--- a/usecase/TCS_Agentic_AI_UC05_Zero_Touch_Incident_Command.pptx
+++ b/usecase/TCS_Agentic_AI_UC05_Zero_Touch_Incident_Command.pptx
@@ -2218,7 +2218,7 @@
         </p:nvSpPr>
         <p:spPr>
           <a:xfrm>
-            <a:off x="0" y="2788920"/>
+            <a:off x="0" y="3035808"/>
             <a:ext cx="12188952" cy="41148"/>
           </a:xfrm>
           <a:prstGeom prst="rect">
@@ -2238,8 +2238,8 @@
         </p:nvSpPr>
         <p:spPr>
           <a:xfrm>
-            <a:off x="731520" y="1600200"/>
-            <a:ext cx="5486400" cy="274320"/>
+            <a:off x="731520" y="1481328"/>
+            <a:ext cx="7315200" cy="274320"/>
           </a:xfrm>
           <a:prstGeom prst="rect">
             <a:avLst/>
@@ -2263,7 +2263,7 @@
                 <a:ea typeface="Inter" pitchFamily="34" charset="-122"/>
                 <a:cs typeface="Inter" pitchFamily="34" charset="-120"/>
               </a:rPr>
-              <a:t>USE CASE 05</a:t>
+              <a:t>TCS AGENTIC AI   ·   USE CASE 05</a:t>
             </a:r>
             <a:endParaRPr lang="en-US" sz="1300" dirty="0"/>
           </a:p>
@@ -2277,7 +2277,7 @@
         </p:nvSpPr>
         <p:spPr>
           <a:xfrm>
-            <a:off x="731520" y="1920240"/>
+            <a:off x="731520" y="1810512"/>
             <a:ext cx="10607040" cy="777240"/>
           </a:xfrm>
           <a:prstGeom prst="rect">
@@ -2294,7 +2294,7 @@
               <a:buNone/>
             </a:pPr>
             <a:r>
-              <a:rPr lang="en-US" sz="4200" b="1" dirty="0">
+              <a:rPr lang="en-US" sz="4000" b="1" dirty="0">
                 <a:solidFill>
                   <a:srgbClr val="FFFFFF"/>
                 </a:solidFill>
@@ -2304,7 +2304,7 @@
               </a:rPr>
               <a:t>Zero-Touch Incident Command</a:t>
             </a:r>
-            <a:endParaRPr lang="en-US" sz="4200" dirty="0"/>
+            <a:endParaRPr lang="en-US" sz="4000" dirty="0"/>
           </a:p>
         </p:txBody>
       </p:sp>
@@ -2316,8 +2316,51 @@
         </p:nvSpPr>
         <p:spPr>
           <a:xfrm>
-            <a:off x="731520" y="2971800"/>
-            <a:ext cx="10607040" cy="365760"/>
+            <a:off x="731520" y="2578608"/>
+            <a:ext cx="1097280" cy="292608"/>
+          </a:xfrm>
+          <a:prstGeom prst="rect">
+            <a:avLst>
+              <a:gd name="adj" fmla="val 15625"/>
+            </a:avLst>
+          </a:prstGeom>
+          <a:solidFill>
+            <a:srgbClr val="2563EB"/>
+          </a:solidFill>
+          <a:ln/>
+        </p:spPr>
+        <p:txBody>
+          <a:bodyPr wrap="square" rtlCol="0" anchor="ctr"/>
+          <a:lstStyle/>
+          <a:p>
+            <a:pPr algn="ctr" indent="0" marL="0">
+              <a:buNone/>
+            </a:pPr>
+            <a:r>
+              <a:rPr lang="en-US" sz="1300" b="1" dirty="0">
+                <a:solidFill>
+                  <a:srgbClr val="FFFFFF"/>
+                </a:solidFill>
+                <a:latin typeface="Inter" pitchFamily="34" charset="0"/>
+                <a:ea typeface="Inter" pitchFamily="34" charset="-122"/>
+                <a:cs typeface="Inter" pitchFamily="34" charset="-120"/>
+              </a:rPr>
+              <a:t>ZTIC</a:t>
+            </a:r>
+            <a:endParaRPr lang="en-US" sz="1300" dirty="0"/>
+          </a:p>
+        </p:txBody>
+      </p:sp>
+      <p:sp>
+        <p:nvSpPr>
+          <p:cNvPr id="6" name="Text 4"/>
+          <p:cNvSpPr/>
+          <p:nvPr/>
+        </p:nvSpPr>
+        <p:spPr>
+          <a:xfrm>
+            <a:off x="1920240" y="2578608"/>
+            <a:ext cx="4572000" cy="292608"/>
           </a:xfrm>
           <a:prstGeom prst="rect">
             <a:avLst/>
@@ -2333,7 +2376,46 @@
               <a:buNone/>
             </a:pPr>
             <a:r>
-              <a:rPr lang="en-US" sz="1600" dirty="0">
+              <a:rPr lang="en-US" sz="1100" dirty="0">
+                <a:solidFill>
+                  <a:srgbClr val="64748B"/>
+                </a:solidFill>
+                <a:latin typeface="Inter" pitchFamily="34" charset="0"/>
+                <a:ea typeface="Inter" pitchFamily="34" charset="-122"/>
+                <a:cs typeface="Inter" pitchFamily="34" charset="-120"/>
+              </a:rPr>
+              <a:t>the short name for demos</a:t>
+            </a:r>
+            <a:endParaRPr lang="en-US" sz="1100" dirty="0"/>
+          </a:p>
+        </p:txBody>
+      </p:sp>
+      <p:sp>
+        <p:nvSpPr>
+          <p:cNvPr id="7" name="Text 5"/>
+          <p:cNvSpPr/>
+          <p:nvPr/>
+        </p:nvSpPr>
+        <p:spPr>
+          <a:xfrm>
+            <a:off x="731520" y="3200400"/>
+            <a:ext cx="10607040" cy="365760"/>
+          </a:xfrm>
+          <a:prstGeom prst="rect">
+            <a:avLst/>
+          </a:prstGeom>
+          <a:noFill/>
+          <a:ln/>
+        </p:spPr>
+        <p:txBody>
+          <a:bodyPr wrap="square" rtlCol="0" anchor="ctr"/>
+          <a:lstStyle/>
+          <a:p>
+            <a:pPr indent="0" marL="0">
+              <a:buNone/>
+            </a:pPr>
+            <a:r>
+              <a:rPr lang="en-US" sz="1550" dirty="0">
                 <a:solidFill>
                   <a:srgbClr val="94A3B8"/>
                 </a:solidFill>
@@ -2343,19 +2425,19 @@
               </a:rPr>
               <a:t>Self-detecting · Self-documenting · Self-closing · Self-reverting incident lifecycle</a:t>
             </a:r>
-            <a:endParaRPr lang="en-US" sz="1600" dirty="0"/>
+            <a:endParaRPr lang="en-US" sz="1550" dirty="0"/>
           </a:p>
         </p:txBody>
       </p:sp>
       <p:sp>
         <p:nvSpPr>
-          <p:cNvPr id="6" name="Text 4"/>
-          <p:cNvSpPr/>
-          <p:nvPr/>
-        </p:nvSpPr>
-        <p:spPr>
-          <a:xfrm>
-            <a:off x="731520" y="3520440"/>
+          <p:cNvPr id="8" name="Text 6"/>
+          <p:cNvSpPr/>
+          <p:nvPr/>
+        </p:nvSpPr>
+        <p:spPr>
+          <a:xfrm>
+            <a:off x="731520" y="3703320"/>
             <a:ext cx="10607040" cy="365760"/>
           </a:xfrm>
           <a:prstGeom prst="rect">
@@ -2388,13 +2470,13 @@
       </p:sp>
       <p:sp>
         <p:nvSpPr>
-          <p:cNvPr id="7" name="Shape 5"/>
-          <p:cNvSpPr/>
-          <p:nvPr/>
-        </p:nvSpPr>
-        <p:spPr>
-          <a:xfrm>
-            <a:off x="731520" y="4297680"/>
+          <p:cNvPr id="9" name="Shape 7"/>
+          <p:cNvSpPr/>
+          <p:nvPr/>
+        </p:nvSpPr>
+        <p:spPr>
+          <a:xfrm>
+            <a:off x="731520" y="4434840"/>
             <a:ext cx="2011680" cy="1051560"/>
           </a:xfrm>
           <a:prstGeom prst="roundRect">
@@ -2415,13 +2497,13 @@
       </p:sp>
       <p:sp>
         <p:nvSpPr>
-          <p:cNvPr id="8" name="Text 6"/>
-          <p:cNvSpPr/>
-          <p:nvPr/>
-        </p:nvSpPr>
-        <p:spPr>
-          <a:xfrm>
-            <a:off x="731520" y="4407408"/>
+          <p:cNvPr id="10" name="Text 8"/>
+          <p:cNvSpPr/>
+          <p:nvPr/>
+        </p:nvSpPr>
+        <p:spPr>
+          <a:xfrm>
+            <a:off x="731520" y="4544568"/>
             <a:ext cx="2011680" cy="457200"/>
           </a:xfrm>
           <a:prstGeom prst="rect">
@@ -2454,13 +2536,13 @@
       </p:sp>
       <p:sp>
         <p:nvSpPr>
-          <p:cNvPr id="9" name="Text 7"/>
-          <p:cNvSpPr/>
-          <p:nvPr/>
-        </p:nvSpPr>
-        <p:spPr>
-          <a:xfrm>
-            <a:off x="731520" y="4864608"/>
+          <p:cNvPr id="11" name="Text 9"/>
+          <p:cNvSpPr/>
+          <p:nvPr/>
+        </p:nvSpPr>
+        <p:spPr>
+          <a:xfrm>
+            <a:off x="731520" y="5001768"/>
             <a:ext cx="2011680" cy="274320"/>
           </a:xfrm>
           <a:prstGeom prst="rect">
@@ -2493,13 +2575,13 @@
       </p:sp>
       <p:sp>
         <p:nvSpPr>
-          <p:cNvPr id="10" name="Shape 8"/>
-          <p:cNvSpPr/>
-          <p:nvPr/>
-        </p:nvSpPr>
-        <p:spPr>
-          <a:xfrm>
-            <a:off x="2944368" y="4297680"/>
+          <p:cNvPr id="12" name="Shape 10"/>
+          <p:cNvSpPr/>
+          <p:nvPr/>
+        </p:nvSpPr>
+        <p:spPr>
+          <a:xfrm>
+            <a:off x="2944368" y="4434840"/>
             <a:ext cx="2011680" cy="1051560"/>
           </a:xfrm>
           <a:prstGeom prst="roundRect">
@@ -2520,13 +2602,13 @@
       </p:sp>
       <p:sp>
         <p:nvSpPr>
-          <p:cNvPr id="11" name="Text 9"/>
-          <p:cNvSpPr/>
-          <p:nvPr/>
-        </p:nvSpPr>
-        <p:spPr>
-          <a:xfrm>
-            <a:off x="2944368" y="4407408"/>
+          <p:cNvPr id="13" name="Text 11"/>
+          <p:cNvSpPr/>
+          <p:nvPr/>
+        </p:nvSpPr>
+        <p:spPr>
+          <a:xfrm>
+            <a:off x="2944368" y="4544568"/>
             <a:ext cx="2011680" cy="457200"/>
           </a:xfrm>
           <a:prstGeom prst="rect">
@@ -2559,13 +2641,13 @@
       </p:sp>
       <p:sp>
         <p:nvSpPr>
-          <p:cNvPr id="12" name="Text 10"/>
-          <p:cNvSpPr/>
-          <p:nvPr/>
-        </p:nvSpPr>
-        <p:spPr>
-          <a:xfrm>
-            <a:off x="2944368" y="4864608"/>
+          <p:cNvPr id="14" name="Text 12"/>
+          <p:cNvSpPr/>
+          <p:nvPr/>
+        </p:nvSpPr>
+        <p:spPr>
+          <a:xfrm>
+            <a:off x="2944368" y="5001768"/>
             <a:ext cx="2011680" cy="274320"/>
           </a:xfrm>
           <a:prstGeom prst="rect">
@@ -2598,13 +2680,13 @@
       </p:sp>
       <p:sp>
         <p:nvSpPr>
-          <p:cNvPr id="13" name="Shape 11"/>
-          <p:cNvSpPr/>
-          <p:nvPr/>
-        </p:nvSpPr>
-        <p:spPr>
-          <a:xfrm>
-            <a:off x="5157216" y="4297680"/>
+          <p:cNvPr id="15" name="Shape 13"/>
+          <p:cNvSpPr/>
+          <p:nvPr/>
+        </p:nvSpPr>
+        <p:spPr>
+          <a:xfrm>
+            <a:off x="5157216" y="4434840"/>
             <a:ext cx="2011680" cy="1051560"/>
           </a:xfrm>
           <a:prstGeom prst="roundRect">
@@ -2625,13 +2707,13 @@
       </p:sp>
       <p:sp>
         <p:nvSpPr>
-          <p:cNvPr id="14" name="Text 12"/>
-          <p:cNvSpPr/>
-          <p:nvPr/>
-        </p:nvSpPr>
-        <p:spPr>
-          <a:xfrm>
-            <a:off x="5157216" y="4407408"/>
+          <p:cNvPr id="16" name="Text 14"/>
+          <p:cNvSpPr/>
+          <p:nvPr/>
+        </p:nvSpPr>
+        <p:spPr>
+          <a:xfrm>
+            <a:off x="5157216" y="4544568"/>
             <a:ext cx="2011680" cy="457200"/>
           </a:xfrm>
           <a:prstGeom prst="rect">
@@ -2664,13 +2746,13 @@
       </p:sp>
       <p:sp>
         <p:nvSpPr>
-          <p:cNvPr id="15" name="Text 13"/>
-          <p:cNvSpPr/>
-          <p:nvPr/>
-        </p:nvSpPr>
-        <p:spPr>
-          <a:xfrm>
-            <a:off x="5157216" y="4864608"/>
+          <p:cNvPr id="17" name="Text 15"/>
+          <p:cNvSpPr/>
+          <p:nvPr/>
+        </p:nvSpPr>
+        <p:spPr>
+          <a:xfrm>
+            <a:off x="5157216" y="5001768"/>
             <a:ext cx="2011680" cy="274320"/>
           </a:xfrm>
           <a:prstGeom prst="rect">
@@ -2703,13 +2785,13 @@
       </p:sp>
       <p:sp>
         <p:nvSpPr>
-          <p:cNvPr id="16" name="Shape 14"/>
-          <p:cNvSpPr/>
-          <p:nvPr/>
-        </p:nvSpPr>
-        <p:spPr>
-          <a:xfrm>
-            <a:off x="7370064" y="4297680"/>
+          <p:cNvPr id="18" name="Shape 16"/>
+          <p:cNvSpPr/>
+          <p:nvPr/>
+        </p:nvSpPr>
+        <p:spPr>
+          <a:xfrm>
+            <a:off x="7370064" y="4434840"/>
             <a:ext cx="2011680" cy="1051560"/>
           </a:xfrm>
           <a:prstGeom prst="roundRect">
@@ -2730,13 +2812,13 @@
       </p:sp>
       <p:sp>
         <p:nvSpPr>
-          <p:cNvPr id="17" name="Text 15"/>
-          <p:cNvSpPr/>
-          <p:nvPr/>
-        </p:nvSpPr>
-        <p:spPr>
-          <a:xfrm>
-            <a:off x="7370064" y="4407408"/>
+          <p:cNvPr id="19" name="Text 17"/>
+          <p:cNvSpPr/>
+          <p:nvPr/>
+        </p:nvSpPr>
+        <p:spPr>
+          <a:xfrm>
+            <a:off x="7370064" y="4544568"/>
             <a:ext cx="2011680" cy="457200"/>
           </a:xfrm>
           <a:prstGeom prst="rect">
@@ -2769,13 +2851,13 @@
       </p:sp>
       <p:sp>
         <p:nvSpPr>
-          <p:cNvPr id="18" name="Text 16"/>
-          <p:cNvSpPr/>
-          <p:nvPr/>
-        </p:nvSpPr>
-        <p:spPr>
-          <a:xfrm>
-            <a:off x="7370064" y="4864608"/>
+          <p:cNvPr id="20" name="Text 18"/>
+          <p:cNvSpPr/>
+          <p:nvPr/>
+        </p:nvSpPr>
+        <p:spPr>
+          <a:xfrm>
+            <a:off x="7370064" y="5001768"/>
             <a:ext cx="2011680" cy="274320"/>
           </a:xfrm>
           <a:prstGeom prst="rect">
@@ -2808,13 +2890,13 @@
       </p:sp>
       <p:sp>
         <p:nvSpPr>
-          <p:cNvPr id="19" name="Shape 17"/>
-          <p:cNvSpPr/>
-          <p:nvPr/>
-        </p:nvSpPr>
-        <p:spPr>
-          <a:xfrm>
-            <a:off x="9582912" y="4297680"/>
+          <p:cNvPr id="21" name="Shape 19"/>
+          <p:cNvSpPr/>
+          <p:nvPr/>
+        </p:nvSpPr>
+        <p:spPr>
+          <a:xfrm>
+            <a:off x="9582912" y="4434840"/>
             <a:ext cx="2011680" cy="1051560"/>
           </a:xfrm>
           <a:prstGeom prst="roundRect">
@@ -2835,13 +2917,13 @@
       </p:sp>
       <p:sp>
         <p:nvSpPr>
-          <p:cNvPr id="20" name="Text 18"/>
-          <p:cNvSpPr/>
-          <p:nvPr/>
-        </p:nvSpPr>
-        <p:spPr>
-          <a:xfrm>
-            <a:off x="9582912" y="4407408"/>
+          <p:cNvPr id="22" name="Text 20"/>
+          <p:cNvSpPr/>
+          <p:nvPr/>
+        </p:nvSpPr>
+        <p:spPr>
+          <a:xfrm>
+            <a:off x="9582912" y="4544568"/>
             <a:ext cx="2011680" cy="457200"/>
           </a:xfrm>
           <a:prstGeom prst="rect">
@@ -2874,13 +2956,13 @@
       </p:sp>
       <p:sp>
         <p:nvSpPr>
-          <p:cNvPr id="21" name="Text 19"/>
-          <p:cNvSpPr/>
-          <p:nvPr/>
-        </p:nvSpPr>
-        <p:spPr>
-          <a:xfrm>
-            <a:off x="9582912" y="4864608"/>
+          <p:cNvPr id="23" name="Text 21"/>
+          <p:cNvSpPr/>
+          <p:nvPr/>
+        </p:nvSpPr>
+        <p:spPr>
+          <a:xfrm>
+            <a:off x="9582912" y="5001768"/>
             <a:ext cx="2011680" cy="274320"/>
           </a:xfrm>
           <a:prstGeom prst="rect">
@@ -2913,13 +2995,13 @@
       </p:sp>
       <p:sp>
         <p:nvSpPr>
-          <p:cNvPr id="22" name="Text 20"/>
-          <p:cNvSpPr/>
-          <p:nvPr/>
-        </p:nvSpPr>
-        <p:spPr>
-          <a:xfrm>
-            <a:off x="731520" y="5806440"/>
+          <p:cNvPr id="24" name="Text 22"/>
+          <p:cNvSpPr/>
+          <p:nvPr/>
+        </p:nvSpPr>
+        <p:spPr>
+          <a:xfrm>
+            <a:off x="731520" y="5897880"/>
             <a:ext cx="10607040" cy="274320"/>
           </a:xfrm>
           <a:prstGeom prst="rect">
@@ -2944,7 +3026,7 @@
                 <a:ea typeface="Inter" pitchFamily="34" charset="-122"/>
                 <a:cs typeface="Inter" pitchFamily="34" charset="-120"/>
               </a:rPr>
-              <a:t>TCS Agentic AI for OpenShift  ·  Autonomous ITSM / AIOps</a:t>
+              <a:t>TCS Agentic AI for OpenShift  ·  Autonomous ITSM / AIOps  ·  Tata Consultancy Services</a:t>
             </a:r>
             <a:endParaRPr lang="en-US" sz="1100" dirty="0"/>
           </a:p>
@@ -3081,12 +3163,12 @@
         </p:nvSpPr>
         <p:spPr>
           <a:xfrm>
-            <a:off x="10881360" y="256032"/>
-            <a:ext cx="1005840" cy="329184"/>
+            <a:off x="10625328" y="182880"/>
+            <a:ext cx="1234440" cy="310896"/>
           </a:xfrm>
           <a:prstGeom prst="rect">
             <a:avLst>
-              <a:gd name="adj" fmla="val 13889"/>
+              <a:gd name="adj" fmla="val 14706"/>
             </a:avLst>
           </a:prstGeom>
           <a:solidFill>
@@ -3110,7 +3192,7 @@
                 <a:ea typeface="Inter" pitchFamily="34" charset="-122"/>
                 <a:cs typeface="Inter" pitchFamily="34" charset="-120"/>
               </a:rPr>
-              <a:t>UC-05</a:t>
+              <a:t>ZTIC</a:t>
             </a:r>
             <a:endParaRPr lang="en-US" sz="1300" dirty="0"/>
           </a:p>
@@ -3119,6 +3201,45 @@
       <p:sp>
         <p:nvSpPr>
           <p:cNvPr id="6" name="Text 4"/>
+          <p:cNvSpPr/>
+          <p:nvPr/>
+        </p:nvSpPr>
+        <p:spPr>
+          <a:xfrm>
+            <a:off x="10168128" y="512064"/>
+            <a:ext cx="1691640" cy="201168"/>
+          </a:xfrm>
+          <a:prstGeom prst="rect">
+            <a:avLst/>
+          </a:prstGeom>
+          <a:noFill/>
+          <a:ln/>
+        </p:spPr>
+        <p:txBody>
+          <a:bodyPr wrap="square" rtlCol="0" anchor="ctr"/>
+          <a:lstStyle/>
+          <a:p>
+            <a:pPr algn="ctr" indent="0" marL="0">
+              <a:buNone/>
+            </a:pPr>
+            <a:r>
+              <a:rPr lang="en-US" sz="750" dirty="0">
+                <a:solidFill>
+                  <a:srgbClr val="94A3B8"/>
+                </a:solidFill>
+                <a:latin typeface="Inter" pitchFamily="34" charset="0"/>
+                <a:ea typeface="Inter" pitchFamily="34" charset="-122"/>
+                <a:cs typeface="Inter" pitchFamily="34" charset="-120"/>
+              </a:rPr>
+              <a:t>TCS Agentic AI · UC-05</a:t>
+            </a:r>
+            <a:endParaRPr lang="en-US" sz="750" dirty="0"/>
+          </a:p>
+        </p:txBody>
+      </p:sp>
+      <p:sp>
+        <p:nvSpPr>
+          <p:cNvPr id="7" name="Text 5"/>
           <p:cNvSpPr/>
           <p:nvPr/>
         </p:nvSpPr>
@@ -3157,7 +3278,7 @@
       </p:sp>
       <p:sp>
         <p:nvSpPr>
-          <p:cNvPr id="7" name="Shape 5"/>
+          <p:cNvPr id="8" name="Shape 6"/>
           <p:cNvSpPr/>
           <p:nvPr/>
         </p:nvSpPr>
@@ -3184,7 +3305,7 @@
       </p:sp>
       <p:sp>
         <p:nvSpPr>
-          <p:cNvPr id="8" name="Text 6"/>
+          <p:cNvPr id="9" name="Text 7"/>
           <p:cNvSpPr/>
           <p:nvPr/>
         </p:nvSpPr>
@@ -3223,7 +3344,7 @@
       </p:sp>
       <p:sp>
         <p:nvSpPr>
-          <p:cNvPr id="9" name="Text 7"/>
+          <p:cNvPr id="10" name="Text 8"/>
           <p:cNvSpPr/>
           <p:nvPr/>
         </p:nvSpPr>
@@ -3279,7 +3400,7 @@
       </p:sp>
       <p:sp>
         <p:nvSpPr>
-          <p:cNvPr id="10" name="Shape 8"/>
+          <p:cNvPr id="11" name="Shape 9"/>
           <p:cNvSpPr/>
           <p:nvPr/>
         </p:nvSpPr>
@@ -3306,7 +3427,7 @@
       </p:sp>
       <p:sp>
         <p:nvSpPr>
-          <p:cNvPr id="11" name="Text 9"/>
+          <p:cNvPr id="12" name="Text 10"/>
           <p:cNvSpPr/>
           <p:nvPr/>
         </p:nvSpPr>
@@ -3345,7 +3466,7 @@
       </p:sp>
       <p:sp>
         <p:nvSpPr>
-          <p:cNvPr id="12" name="Text 10"/>
+          <p:cNvPr id="13" name="Text 11"/>
           <p:cNvSpPr/>
           <p:nvPr/>
         </p:nvSpPr>
@@ -3401,7 +3522,7 @@
       </p:sp>
       <p:sp>
         <p:nvSpPr>
-          <p:cNvPr id="13" name="Shape 11"/>
+          <p:cNvPr id="14" name="Shape 12"/>
           <p:cNvSpPr/>
           <p:nvPr/>
         </p:nvSpPr>
@@ -3428,7 +3549,7 @@
       </p:sp>
       <p:sp>
         <p:nvSpPr>
-          <p:cNvPr id="14" name="Text 12"/>
+          <p:cNvPr id="15" name="Text 13"/>
           <p:cNvSpPr/>
           <p:nvPr/>
         </p:nvSpPr>
@@ -3467,7 +3588,7 @@
       </p:sp>
       <p:sp>
         <p:nvSpPr>
-          <p:cNvPr id="15" name="Text 13"/>
+          <p:cNvPr id="16" name="Text 14"/>
           <p:cNvSpPr/>
           <p:nvPr/>
         </p:nvSpPr>
@@ -3523,7 +3644,7 @@
       </p:sp>
       <p:sp>
         <p:nvSpPr>
-          <p:cNvPr id="16" name="Text 14"/>
+          <p:cNvPr id="17" name="Text 15"/>
           <p:cNvSpPr/>
           <p:nvPr/>
         </p:nvSpPr>
@@ -3562,7 +3683,7 @@
       </p:sp>
       <p:sp>
         <p:nvSpPr>
-          <p:cNvPr id="17" name="Shape 15"/>
+          <p:cNvPr id="18" name="Shape 16"/>
           <p:cNvSpPr/>
           <p:nvPr/>
         </p:nvSpPr>
@@ -3587,7 +3708,7 @@
       </p:sp>
       <p:sp>
         <p:nvSpPr>
-          <p:cNvPr id="18" name="Text 16"/>
+          <p:cNvPr id="19" name="Text 17"/>
           <p:cNvSpPr/>
           <p:nvPr/>
         </p:nvSpPr>
@@ -3626,7 +3747,7 @@
       </p:sp>
       <p:sp>
         <p:nvSpPr>
-          <p:cNvPr id="19" name="Text 17"/>
+          <p:cNvPr id="20" name="Text 18"/>
           <p:cNvSpPr/>
           <p:nvPr/>
         </p:nvSpPr>
@@ -3665,7 +3786,7 @@
       </p:sp>
       <p:sp>
         <p:nvSpPr>
-          <p:cNvPr id="20" name="Shape 18"/>
+          <p:cNvPr id="21" name="Shape 19"/>
           <p:cNvSpPr/>
           <p:nvPr/>
         </p:nvSpPr>
@@ -3690,7 +3811,7 @@
       </p:sp>
       <p:sp>
         <p:nvSpPr>
-          <p:cNvPr id="21" name="Text 19"/>
+          <p:cNvPr id="22" name="Text 20"/>
           <p:cNvSpPr/>
           <p:nvPr/>
         </p:nvSpPr>
@@ -3729,7 +3850,7 @@
       </p:sp>
       <p:sp>
         <p:nvSpPr>
-          <p:cNvPr id="22" name="Text 20"/>
+          <p:cNvPr id="23" name="Text 21"/>
           <p:cNvSpPr/>
           <p:nvPr/>
         </p:nvSpPr>
@@ -3768,7 +3889,7 @@
       </p:sp>
       <p:sp>
         <p:nvSpPr>
-          <p:cNvPr id="23" name="Shape 21"/>
+          <p:cNvPr id="24" name="Shape 22"/>
           <p:cNvSpPr/>
           <p:nvPr/>
         </p:nvSpPr>
@@ -3793,7 +3914,7 @@
       </p:sp>
       <p:sp>
         <p:nvSpPr>
-          <p:cNvPr id="24" name="Text 22"/>
+          <p:cNvPr id="25" name="Text 23"/>
           <p:cNvSpPr/>
           <p:nvPr/>
         </p:nvSpPr>
@@ -3832,7 +3953,7 @@
       </p:sp>
       <p:sp>
         <p:nvSpPr>
-          <p:cNvPr id="25" name="Text 23"/>
+          <p:cNvPr id="26" name="Text 24"/>
           <p:cNvSpPr/>
           <p:nvPr/>
         </p:nvSpPr>
@@ -3871,7 +3992,7 @@
       </p:sp>
       <p:sp>
         <p:nvSpPr>
-          <p:cNvPr id="26" name="Shape 24"/>
+          <p:cNvPr id="27" name="Shape 25"/>
           <p:cNvSpPr/>
           <p:nvPr/>
         </p:nvSpPr>
@@ -3896,7 +4017,7 @@
       </p:sp>
       <p:sp>
         <p:nvSpPr>
-          <p:cNvPr id="27" name="Text 25"/>
+          <p:cNvPr id="28" name="Text 26"/>
           <p:cNvSpPr/>
           <p:nvPr/>
         </p:nvSpPr>
@@ -3935,7 +4056,7 @@
       </p:sp>
       <p:sp>
         <p:nvSpPr>
-          <p:cNvPr id="28" name="Text 26"/>
+          <p:cNvPr id="29" name="Text 27"/>
           <p:cNvSpPr/>
           <p:nvPr/>
         </p:nvSpPr>
@@ -3974,7 +4095,7 @@
       </p:sp>
       <p:sp>
         <p:nvSpPr>
-          <p:cNvPr id="29" name="Shape 27"/>
+          <p:cNvPr id="30" name="Shape 28"/>
           <p:cNvSpPr/>
           <p:nvPr/>
         </p:nvSpPr>
@@ -3999,7 +4120,7 @@
       </p:sp>
       <p:sp>
         <p:nvSpPr>
-          <p:cNvPr id="30" name="Text 28"/>
+          <p:cNvPr id="31" name="Text 29"/>
           <p:cNvSpPr/>
           <p:nvPr/>
         </p:nvSpPr>
@@ -4038,7 +4159,7 @@
       </p:sp>
       <p:sp>
         <p:nvSpPr>
-          <p:cNvPr id="31" name="Text 29"/>
+          <p:cNvPr id="32" name="Text 30"/>
           <p:cNvSpPr/>
           <p:nvPr/>
         </p:nvSpPr>
@@ -4077,7 +4198,7 @@
       </p:sp>
       <p:sp>
         <p:nvSpPr>
-          <p:cNvPr id="32" name="Shape 30"/>
+          <p:cNvPr id="33" name="Shape 31"/>
           <p:cNvSpPr/>
           <p:nvPr/>
         </p:nvSpPr>
@@ -4102,7 +4223,7 @@
       </p:sp>
       <p:sp>
         <p:nvSpPr>
-          <p:cNvPr id="33" name="Text 31"/>
+          <p:cNvPr id="34" name="Text 32"/>
           <p:cNvSpPr/>
           <p:nvPr/>
         </p:nvSpPr>
@@ -4141,7 +4262,7 @@
       </p:sp>
       <p:sp>
         <p:nvSpPr>
-          <p:cNvPr id="34" name="Text 32"/>
+          <p:cNvPr id="35" name="Text 33"/>
           <p:cNvSpPr/>
           <p:nvPr/>
         </p:nvSpPr>
@@ -4180,7 +4301,7 @@
       </p:sp>
       <p:sp>
         <p:nvSpPr>
-          <p:cNvPr id="35" name="Shape 33"/>
+          <p:cNvPr id="36" name="Shape 34"/>
           <p:cNvSpPr/>
           <p:nvPr/>
         </p:nvSpPr>
@@ -4205,7 +4326,7 @@
       </p:sp>
       <p:sp>
         <p:nvSpPr>
-          <p:cNvPr id="36" name="Text 34"/>
+          <p:cNvPr id="37" name="Text 35"/>
           <p:cNvSpPr/>
           <p:nvPr/>
         </p:nvSpPr>
@@ -4244,7 +4365,7 @@
       </p:sp>
       <p:sp>
         <p:nvSpPr>
-          <p:cNvPr id="37" name="Text 35"/>
+          <p:cNvPr id="38" name="Text 36"/>
           <p:cNvSpPr/>
           <p:nvPr/>
         </p:nvSpPr>
@@ -4283,7 +4404,7 @@
       </p:sp>
       <p:sp>
         <p:nvSpPr>
-          <p:cNvPr id="38" name="Shape 36"/>
+          <p:cNvPr id="39" name="Shape 37"/>
           <p:cNvSpPr/>
           <p:nvPr/>
         </p:nvSpPr>
@@ -4308,7 +4429,7 @@
       </p:sp>
       <p:sp>
         <p:nvSpPr>
-          <p:cNvPr id="39" name="Text 37"/>
+          <p:cNvPr id="40" name="Text 38"/>
           <p:cNvSpPr/>
           <p:nvPr/>
         </p:nvSpPr>
@@ -4347,7 +4468,7 @@
       </p:sp>
       <p:sp>
         <p:nvSpPr>
-          <p:cNvPr id="40" name="Text 38"/>
+          <p:cNvPr id="41" name="Text 39"/>
           <p:cNvSpPr/>
           <p:nvPr/>
         </p:nvSpPr>
@@ -4386,7 +4507,7 @@
       </p:sp>
       <p:sp>
         <p:nvSpPr>
-          <p:cNvPr id="41" name="Shape 39"/>
+          <p:cNvPr id="42" name="Shape 40"/>
           <p:cNvSpPr/>
           <p:nvPr/>
         </p:nvSpPr>
@@ -4411,7 +4532,7 @@
       </p:sp>
       <p:sp>
         <p:nvSpPr>
-          <p:cNvPr id="42" name="Text 40"/>
+          <p:cNvPr id="43" name="Text 41"/>
           <p:cNvSpPr/>
           <p:nvPr/>
         </p:nvSpPr>
@@ -4450,7 +4571,7 @@
       </p:sp>
       <p:sp>
         <p:nvSpPr>
-          <p:cNvPr id="43" name="Text 41"/>
+          <p:cNvPr id="44" name="Text 42"/>
           <p:cNvSpPr/>
           <p:nvPr/>
         </p:nvSpPr>
@@ -4489,7 +4610,7 @@
       </p:sp>
       <p:sp>
         <p:nvSpPr>
-          <p:cNvPr id="44" name="Shape 42"/>
+          <p:cNvPr id="45" name="Shape 43"/>
           <p:cNvSpPr/>
           <p:nvPr/>
         </p:nvSpPr>
@@ -4514,7 +4635,7 @@
       </p:sp>
       <p:sp>
         <p:nvSpPr>
-          <p:cNvPr id="45" name="Text 43"/>
+          <p:cNvPr id="46" name="Text 44"/>
           <p:cNvSpPr/>
           <p:nvPr/>
         </p:nvSpPr>
@@ -4553,7 +4674,7 @@
       </p:sp>
       <p:sp>
         <p:nvSpPr>
-          <p:cNvPr id="46" name="Text 44"/>
+          <p:cNvPr id="47" name="Text 45"/>
           <p:cNvSpPr/>
           <p:nvPr/>
         </p:nvSpPr>
@@ -4592,7 +4713,7 @@
       </p:sp>
       <p:sp>
         <p:nvSpPr>
-          <p:cNvPr id="47" name="Text 45"/>
+          <p:cNvPr id="48" name="Text 46"/>
           <p:cNvSpPr/>
           <p:nvPr/>
         </p:nvSpPr>
@@ -4760,12 +4881,12 @@
         </p:nvSpPr>
         <p:spPr>
           <a:xfrm>
-            <a:off x="10881360" y="256032"/>
-            <a:ext cx="1005840" cy="329184"/>
+            <a:off x="10625328" y="182880"/>
+            <a:ext cx="1234440" cy="310896"/>
           </a:xfrm>
           <a:prstGeom prst="rect">
             <a:avLst>
-              <a:gd name="adj" fmla="val 13889"/>
+              <a:gd name="adj" fmla="val 14706"/>
             </a:avLst>
           </a:prstGeom>
           <a:solidFill>
@@ -4789,9 +4910,48 @@
                 <a:ea typeface="Inter" pitchFamily="34" charset="-122"/>
                 <a:cs typeface="Inter" pitchFamily="34" charset="-120"/>
               </a:rPr>
-              <a:t>UC-05</a:t>
+              <a:t>ZTIC</a:t>
             </a:r>
             <a:endParaRPr lang="en-US" sz="1300" dirty="0"/>
+          </a:p>
+        </p:txBody>
+      </p:sp>
+      <p:sp>
+        <p:nvSpPr>
+          <p:cNvPr id="6" name="Text 4"/>
+          <p:cNvSpPr/>
+          <p:nvPr/>
+        </p:nvSpPr>
+        <p:spPr>
+          <a:xfrm>
+            <a:off x="10168128" y="512064"/>
+            <a:ext cx="1691640" cy="201168"/>
+          </a:xfrm>
+          <a:prstGeom prst="rect">
+            <a:avLst/>
+          </a:prstGeom>
+          <a:noFill/>
+          <a:ln/>
+        </p:spPr>
+        <p:txBody>
+          <a:bodyPr wrap="square" rtlCol="0" anchor="ctr"/>
+          <a:lstStyle/>
+          <a:p>
+            <a:pPr algn="ctr" indent="0" marL="0">
+              <a:buNone/>
+            </a:pPr>
+            <a:r>
+              <a:rPr lang="en-US" sz="750" dirty="0">
+                <a:solidFill>
+                  <a:srgbClr val="94A3B8"/>
+                </a:solidFill>
+                <a:latin typeface="Inter" pitchFamily="34" charset="0"/>
+                <a:ea typeface="Inter" pitchFamily="34" charset="-122"/>
+                <a:cs typeface="Inter" pitchFamily="34" charset="-120"/>
+              </a:rPr>
+              <a:t>TCS Agentic AI · UC-05</a:t>
+            </a:r>
+            <a:endParaRPr lang="en-US" sz="750" dirty="0"/>
           </a:p>
         </p:txBody>
       </p:sp>
@@ -6199,7 +6359,7 @@
       </p:graphicFrame>
       <p:sp>
         <p:nvSpPr>
-          <p:cNvPr id="7" name="Shape 4"/>
+          <p:cNvPr id="8" name="Shape 5"/>
           <p:cNvSpPr/>
           <p:nvPr/>
         </p:nvSpPr>
@@ -6226,7 +6386,7 @@
       </p:sp>
       <p:sp>
         <p:nvSpPr>
-          <p:cNvPr id="8" name="Text 5"/>
+          <p:cNvPr id="9" name="Text 6"/>
           <p:cNvSpPr/>
           <p:nvPr/>
         </p:nvSpPr>
@@ -6265,7 +6425,7 @@
       </p:sp>
       <p:sp>
         <p:nvSpPr>
-          <p:cNvPr id="9" name="Text 6"/>
+          <p:cNvPr id="10" name="Text 7"/>
           <p:cNvSpPr/>
           <p:nvPr/>
         </p:nvSpPr>
@@ -6304,7 +6464,7 @@
       </p:sp>
       <p:sp>
         <p:nvSpPr>
-          <p:cNvPr id="10" name="Shape 7"/>
+          <p:cNvPr id="11" name="Shape 8"/>
           <p:cNvSpPr/>
           <p:nvPr/>
         </p:nvSpPr>
@@ -6331,7 +6491,7 @@
       </p:sp>
       <p:sp>
         <p:nvSpPr>
-          <p:cNvPr id="11" name="Text 8"/>
+          <p:cNvPr id="12" name="Text 9"/>
           <p:cNvSpPr/>
           <p:nvPr/>
         </p:nvSpPr>
@@ -6370,7 +6530,7 @@
       </p:sp>
       <p:sp>
         <p:nvSpPr>
-          <p:cNvPr id="12" name="Text 9"/>
+          <p:cNvPr id="13" name="Text 10"/>
           <p:cNvSpPr/>
           <p:nvPr/>
         </p:nvSpPr>
@@ -6409,7 +6569,7 @@
       </p:sp>
       <p:sp>
         <p:nvSpPr>
-          <p:cNvPr id="13" name="Shape 10"/>
+          <p:cNvPr id="14" name="Shape 11"/>
           <p:cNvSpPr/>
           <p:nvPr/>
         </p:nvSpPr>
@@ -6436,7 +6596,7 @@
       </p:sp>
       <p:sp>
         <p:nvSpPr>
-          <p:cNvPr id="14" name="Text 11"/>
+          <p:cNvPr id="15" name="Text 12"/>
           <p:cNvSpPr/>
           <p:nvPr/>
         </p:nvSpPr>
@@ -6475,7 +6635,7 @@
       </p:sp>
       <p:sp>
         <p:nvSpPr>
-          <p:cNvPr id="15" name="Text 12"/>
+          <p:cNvPr id="16" name="Text 13"/>
           <p:cNvSpPr/>
           <p:nvPr/>
         </p:nvSpPr>
@@ -6514,7 +6674,7 @@
       </p:sp>
       <p:sp>
         <p:nvSpPr>
-          <p:cNvPr id="16" name="Shape 13"/>
+          <p:cNvPr id="17" name="Shape 14"/>
           <p:cNvSpPr/>
           <p:nvPr/>
         </p:nvSpPr>
@@ -6541,7 +6701,7 @@
       </p:sp>
       <p:sp>
         <p:nvSpPr>
-          <p:cNvPr id="17" name="Text 14"/>
+          <p:cNvPr id="18" name="Text 15"/>
           <p:cNvSpPr/>
           <p:nvPr/>
         </p:nvSpPr>
@@ -6580,7 +6740,7 @@
       </p:sp>
       <p:sp>
         <p:nvSpPr>
-          <p:cNvPr id="18" name="Text 15"/>
+          <p:cNvPr id="19" name="Text 16"/>
           <p:cNvSpPr/>
           <p:nvPr/>
         </p:nvSpPr>
@@ -6619,7 +6779,7 @@
       </p:sp>
       <p:sp>
         <p:nvSpPr>
-          <p:cNvPr id="19" name="Shape 16"/>
+          <p:cNvPr id="20" name="Shape 17"/>
           <p:cNvSpPr/>
           <p:nvPr/>
         </p:nvSpPr>
@@ -6646,7 +6806,7 @@
       </p:sp>
       <p:sp>
         <p:nvSpPr>
-          <p:cNvPr id="20" name="Text 17"/>
+          <p:cNvPr id="21" name="Text 18"/>
           <p:cNvSpPr/>
           <p:nvPr/>
         </p:nvSpPr>
@@ -6685,7 +6845,7 @@
       </p:sp>
       <p:sp>
         <p:nvSpPr>
-          <p:cNvPr id="21" name="Text 18"/>
+          <p:cNvPr id="22" name="Text 19"/>
           <p:cNvSpPr/>
           <p:nvPr/>
         </p:nvSpPr>
@@ -6724,7 +6884,7 @@
       </p:sp>
       <p:sp>
         <p:nvSpPr>
-          <p:cNvPr id="22" name="Shape 19"/>
+          <p:cNvPr id="23" name="Shape 20"/>
           <p:cNvSpPr/>
           <p:nvPr/>
         </p:nvSpPr>
@@ -6751,7 +6911,7 @@
       </p:sp>
       <p:sp>
         <p:nvSpPr>
-          <p:cNvPr id="23" name="Text 20"/>
+          <p:cNvPr id="24" name="Text 21"/>
           <p:cNvSpPr/>
           <p:nvPr/>
         </p:nvSpPr>
@@ -6790,7 +6950,7 @@
       </p:sp>
       <p:sp>
         <p:nvSpPr>
-          <p:cNvPr id="24" name="Text 21"/>
+          <p:cNvPr id="25" name="Text 22"/>
           <p:cNvSpPr/>
           <p:nvPr/>
         </p:nvSpPr>
@@ -6829,7 +6989,7 @@
       </p:sp>
       <p:sp>
         <p:nvSpPr>
-          <p:cNvPr id="25" name="Text 22"/>
+          <p:cNvPr id="26" name="Text 23"/>
           <p:cNvSpPr/>
           <p:nvPr/>
         </p:nvSpPr>
@@ -6997,12 +7157,12 @@
         </p:nvSpPr>
         <p:spPr>
           <a:xfrm>
-            <a:off x="10881360" y="256032"/>
-            <a:ext cx="1005840" cy="329184"/>
+            <a:off x="10625328" y="182880"/>
+            <a:ext cx="1234440" cy="310896"/>
           </a:xfrm>
           <a:prstGeom prst="rect">
             <a:avLst>
-              <a:gd name="adj" fmla="val 13889"/>
+              <a:gd name="adj" fmla="val 14706"/>
             </a:avLst>
           </a:prstGeom>
           <a:solidFill>
@@ -7026,7 +7186,7 @@
                 <a:ea typeface="Inter" pitchFamily="34" charset="-122"/>
                 <a:cs typeface="Inter" pitchFamily="34" charset="-120"/>
               </a:rPr>
-              <a:t>UC-05</a:t>
+              <a:t>ZTIC</a:t>
             </a:r>
             <a:endParaRPr lang="en-US" sz="1300" dirty="0"/>
           </a:p>
@@ -7035,6 +7195,45 @@
       <p:sp>
         <p:nvSpPr>
           <p:cNvPr id="6" name="Text 4"/>
+          <p:cNvSpPr/>
+          <p:nvPr/>
+        </p:nvSpPr>
+        <p:spPr>
+          <a:xfrm>
+            <a:off x="10168128" y="512064"/>
+            <a:ext cx="1691640" cy="201168"/>
+          </a:xfrm>
+          <a:prstGeom prst="rect">
+            <a:avLst/>
+          </a:prstGeom>
+          <a:noFill/>
+          <a:ln/>
+        </p:spPr>
+        <p:txBody>
+          <a:bodyPr wrap="square" rtlCol="0" anchor="ctr"/>
+          <a:lstStyle/>
+          <a:p>
+            <a:pPr algn="ctr" indent="0" marL="0">
+              <a:buNone/>
+            </a:pPr>
+            <a:r>
+              <a:rPr lang="en-US" sz="750" dirty="0">
+                <a:solidFill>
+                  <a:srgbClr val="94A3B8"/>
+                </a:solidFill>
+                <a:latin typeface="Inter" pitchFamily="34" charset="0"/>
+                <a:ea typeface="Inter" pitchFamily="34" charset="-122"/>
+                <a:cs typeface="Inter" pitchFamily="34" charset="-120"/>
+              </a:rPr>
+              <a:t>TCS Agentic AI · UC-05</a:t>
+            </a:r>
+            <a:endParaRPr lang="en-US" sz="750" dirty="0"/>
+          </a:p>
+        </p:txBody>
+      </p:sp>
+      <p:sp>
+        <p:nvSpPr>
+          <p:cNvPr id="7" name="Text 5"/>
           <p:cNvSpPr/>
           <p:nvPr/>
         </p:nvSpPr>
@@ -7073,7 +7272,7 @@
       </p:sp>
       <p:sp>
         <p:nvSpPr>
-          <p:cNvPr id="7" name="Shape 5"/>
+          <p:cNvPr id="8" name="Shape 6"/>
           <p:cNvSpPr/>
           <p:nvPr/>
         </p:nvSpPr>
@@ -7100,7 +7299,7 @@
       </p:sp>
       <p:sp>
         <p:nvSpPr>
-          <p:cNvPr id="8" name="Text 6"/>
+          <p:cNvPr id="9" name="Text 7"/>
           <p:cNvSpPr/>
           <p:nvPr/>
         </p:nvSpPr>
@@ -7139,7 +7338,7 @@
       </p:sp>
       <p:sp>
         <p:nvSpPr>
-          <p:cNvPr id="9" name="Text 7"/>
+          <p:cNvPr id="10" name="Text 8"/>
           <p:cNvSpPr/>
           <p:nvPr/>
         </p:nvSpPr>
@@ -7178,7 +7377,7 @@
       </p:sp>
       <p:sp>
         <p:nvSpPr>
-          <p:cNvPr id="10" name="Text 8"/>
+          <p:cNvPr id="11" name="Text 9"/>
           <p:cNvSpPr/>
           <p:nvPr/>
         </p:nvSpPr>
@@ -7217,7 +7416,7 @@
       </p:sp>
       <p:sp>
         <p:nvSpPr>
-          <p:cNvPr id="11" name="Shape 9"/>
+          <p:cNvPr id="12" name="Shape 10"/>
           <p:cNvSpPr/>
           <p:nvPr/>
         </p:nvSpPr>
@@ -7244,7 +7443,7 @@
       </p:sp>
       <p:sp>
         <p:nvSpPr>
-          <p:cNvPr id="12" name="Text 10"/>
+          <p:cNvPr id="13" name="Text 11"/>
           <p:cNvSpPr/>
           <p:nvPr/>
         </p:nvSpPr>
@@ -7283,7 +7482,7 @@
       </p:sp>
       <p:sp>
         <p:nvSpPr>
-          <p:cNvPr id="13" name="Text 11"/>
+          <p:cNvPr id="14" name="Text 12"/>
           <p:cNvSpPr/>
           <p:nvPr/>
         </p:nvSpPr>
@@ -7322,7 +7521,7 @@
       </p:sp>
       <p:sp>
         <p:nvSpPr>
-          <p:cNvPr id="14" name="Text 12"/>
+          <p:cNvPr id="15" name="Text 13"/>
           <p:cNvSpPr/>
           <p:nvPr/>
         </p:nvSpPr>
@@ -7361,7 +7560,7 @@
       </p:sp>
       <p:sp>
         <p:nvSpPr>
-          <p:cNvPr id="15" name="Shape 13"/>
+          <p:cNvPr id="16" name="Shape 14"/>
           <p:cNvSpPr/>
           <p:nvPr/>
         </p:nvSpPr>
@@ -7388,7 +7587,7 @@
       </p:sp>
       <p:sp>
         <p:nvSpPr>
-          <p:cNvPr id="16" name="Text 14"/>
+          <p:cNvPr id="17" name="Text 15"/>
           <p:cNvSpPr/>
           <p:nvPr/>
         </p:nvSpPr>
@@ -7427,7 +7626,7 @@
       </p:sp>
       <p:sp>
         <p:nvSpPr>
-          <p:cNvPr id="17" name="Text 15"/>
+          <p:cNvPr id="18" name="Text 16"/>
           <p:cNvSpPr/>
           <p:nvPr/>
         </p:nvSpPr>
@@ -7466,7 +7665,7 @@
       </p:sp>
       <p:sp>
         <p:nvSpPr>
-          <p:cNvPr id="18" name="Text 16"/>
+          <p:cNvPr id="19" name="Text 17"/>
           <p:cNvSpPr/>
           <p:nvPr/>
         </p:nvSpPr>
@@ -7505,7 +7704,7 @@
       </p:sp>
       <p:sp>
         <p:nvSpPr>
-          <p:cNvPr id="19" name="Shape 17"/>
+          <p:cNvPr id="20" name="Shape 18"/>
           <p:cNvSpPr/>
           <p:nvPr/>
         </p:nvSpPr>
@@ -7532,7 +7731,7 @@
       </p:sp>
       <p:sp>
         <p:nvSpPr>
-          <p:cNvPr id="20" name="Text 18"/>
+          <p:cNvPr id="21" name="Text 19"/>
           <p:cNvSpPr/>
           <p:nvPr/>
         </p:nvSpPr>
@@ -7571,7 +7770,7 @@
       </p:sp>
       <p:sp>
         <p:nvSpPr>
-          <p:cNvPr id="21" name="Text 19"/>
+          <p:cNvPr id="22" name="Text 20"/>
           <p:cNvSpPr/>
           <p:nvPr/>
         </p:nvSpPr>
@@ -7610,7 +7809,7 @@
       </p:sp>
       <p:sp>
         <p:nvSpPr>
-          <p:cNvPr id="22" name="Text 20"/>
+          <p:cNvPr id="23" name="Text 21"/>
           <p:cNvSpPr/>
           <p:nvPr/>
         </p:nvSpPr>
@@ -7649,7 +7848,7 @@
       </p:sp>
       <p:sp>
         <p:nvSpPr>
-          <p:cNvPr id="23" name="Shape 21"/>
+          <p:cNvPr id="24" name="Shape 22"/>
           <p:cNvSpPr/>
           <p:nvPr/>
         </p:nvSpPr>
@@ -7676,7 +7875,7 @@
       </p:sp>
       <p:sp>
         <p:nvSpPr>
-          <p:cNvPr id="24" name="Text 22"/>
+          <p:cNvPr id="25" name="Text 23"/>
           <p:cNvSpPr/>
           <p:nvPr/>
         </p:nvSpPr>
@@ -7715,7 +7914,7 @@
       </p:sp>
       <p:sp>
         <p:nvSpPr>
-          <p:cNvPr id="25" name="Text 23"/>
+          <p:cNvPr id="26" name="Text 24"/>
           <p:cNvSpPr/>
           <p:nvPr/>
         </p:nvSpPr>
@@ -8815,7 +9014,7 @@
       </p:graphicFrame>
       <p:sp>
         <p:nvSpPr>
-          <p:cNvPr id="27" name="Shape 24"/>
+          <p:cNvPr id="28" name="Shape 25"/>
           <p:cNvSpPr/>
           <p:nvPr/>
         </p:nvSpPr>
@@ -8842,7 +9041,7 @@
       </p:sp>
       <p:sp>
         <p:nvSpPr>
-          <p:cNvPr id="28" name="Text 25"/>
+          <p:cNvPr id="29" name="Text 26"/>
           <p:cNvSpPr/>
           <p:nvPr/>
         </p:nvSpPr>
@@ -8881,7 +9080,7 @@
       </p:sp>
       <p:sp>
         <p:nvSpPr>
-          <p:cNvPr id="29" name="Text 26"/>
+          <p:cNvPr id="30" name="Text 27"/>
           <p:cNvSpPr/>
           <p:nvPr/>
         </p:nvSpPr>
@@ -8920,7 +9119,7 @@
       </p:sp>
       <p:sp>
         <p:nvSpPr>
-          <p:cNvPr id="30" name="Shape 27"/>
+          <p:cNvPr id="31" name="Shape 28"/>
           <p:cNvSpPr/>
           <p:nvPr/>
         </p:nvSpPr>
@@ -8947,7 +9146,7 @@
       </p:sp>
       <p:sp>
         <p:nvSpPr>
-          <p:cNvPr id="31" name="Text 28"/>
+          <p:cNvPr id="32" name="Text 29"/>
           <p:cNvSpPr/>
           <p:nvPr/>
         </p:nvSpPr>
@@ -8986,7 +9185,7 @@
       </p:sp>
       <p:sp>
         <p:nvSpPr>
-          <p:cNvPr id="32" name="Text 29"/>
+          <p:cNvPr id="33" name="Text 30"/>
           <p:cNvSpPr/>
           <p:nvPr/>
         </p:nvSpPr>
@@ -9025,7 +9224,7 @@
       </p:sp>
       <p:sp>
         <p:nvSpPr>
-          <p:cNvPr id="33" name="Shape 30"/>
+          <p:cNvPr id="34" name="Shape 31"/>
           <p:cNvSpPr/>
           <p:nvPr/>
         </p:nvSpPr>
@@ -9052,7 +9251,7 @@
       </p:sp>
       <p:sp>
         <p:nvSpPr>
-          <p:cNvPr id="34" name="Text 31"/>
+          <p:cNvPr id="35" name="Text 32"/>
           <p:cNvSpPr/>
           <p:nvPr/>
         </p:nvSpPr>
@@ -9091,7 +9290,7 @@
       </p:sp>
       <p:sp>
         <p:nvSpPr>
-          <p:cNvPr id="35" name="Text 32"/>
+          <p:cNvPr id="36" name="Text 33"/>
           <p:cNvSpPr/>
           <p:nvPr/>
         </p:nvSpPr>
@@ -9130,7 +9329,7 @@
       </p:sp>
       <p:sp>
         <p:nvSpPr>
-          <p:cNvPr id="36" name="Text 33"/>
+          <p:cNvPr id="37" name="Text 34"/>
           <p:cNvSpPr/>
           <p:nvPr/>
         </p:nvSpPr>
@@ -9298,12 +9497,12 @@
         </p:nvSpPr>
         <p:spPr>
           <a:xfrm>
-            <a:off x="10881360" y="256032"/>
-            <a:ext cx="1005840" cy="329184"/>
+            <a:off x="10625328" y="182880"/>
+            <a:ext cx="1234440" cy="310896"/>
           </a:xfrm>
           <a:prstGeom prst="rect">
             <a:avLst>
-              <a:gd name="adj" fmla="val 13889"/>
+              <a:gd name="adj" fmla="val 14706"/>
             </a:avLst>
           </a:prstGeom>
           <a:solidFill>
@@ -9327,9 +9526,48 @@
                 <a:ea typeface="Inter" pitchFamily="34" charset="-122"/>
                 <a:cs typeface="Inter" pitchFamily="34" charset="-120"/>
               </a:rPr>
-              <a:t>UC-05</a:t>
+              <a:t>ZTIC</a:t>
             </a:r>
             <a:endParaRPr lang="en-US" sz="1300" dirty="0"/>
+          </a:p>
+        </p:txBody>
+      </p:sp>
+      <p:sp>
+        <p:nvSpPr>
+          <p:cNvPr id="6" name="Text 4"/>
+          <p:cNvSpPr/>
+          <p:nvPr/>
+        </p:nvSpPr>
+        <p:spPr>
+          <a:xfrm>
+            <a:off x="10168128" y="512064"/>
+            <a:ext cx="1691640" cy="201168"/>
+          </a:xfrm>
+          <a:prstGeom prst="rect">
+            <a:avLst/>
+          </a:prstGeom>
+          <a:noFill/>
+          <a:ln/>
+        </p:spPr>
+        <p:txBody>
+          <a:bodyPr wrap="square" rtlCol="0" anchor="ctr"/>
+          <a:lstStyle/>
+          <a:p>
+            <a:pPr algn="ctr" indent="0" marL="0">
+              <a:buNone/>
+            </a:pPr>
+            <a:r>
+              <a:rPr lang="en-US" sz="750" dirty="0">
+                <a:solidFill>
+                  <a:srgbClr val="94A3B8"/>
+                </a:solidFill>
+                <a:latin typeface="Inter" pitchFamily="34" charset="0"/>
+                <a:ea typeface="Inter" pitchFamily="34" charset="-122"/>
+                <a:cs typeface="Inter" pitchFamily="34" charset="-120"/>
+              </a:rPr>
+              <a:t>TCS Agentic AI · UC-05</a:t>
+            </a:r>
+            <a:endParaRPr lang="en-US" sz="750" dirty="0"/>
           </a:p>
         </p:txBody>
       </p:sp>
@@ -11220,7 +11458,7 @@
       </p:graphicFrame>
       <p:sp>
         <p:nvSpPr>
-          <p:cNvPr id="7" name="Text 4"/>
+          <p:cNvPr id="8" name="Text 5"/>
           <p:cNvSpPr/>
           <p:nvPr/>
         </p:nvSpPr>
@@ -11388,12 +11626,12 @@
         </p:nvSpPr>
         <p:spPr>
           <a:xfrm>
-            <a:off x="10881360" y="256032"/>
-            <a:ext cx="1005840" cy="329184"/>
+            <a:off x="10625328" y="182880"/>
+            <a:ext cx="1234440" cy="310896"/>
           </a:xfrm>
           <a:prstGeom prst="rect">
             <a:avLst>
-              <a:gd name="adj" fmla="val 13889"/>
+              <a:gd name="adj" fmla="val 14706"/>
             </a:avLst>
           </a:prstGeom>
           <a:solidFill>
@@ -11417,9 +11655,48 @@
                 <a:ea typeface="Inter" pitchFamily="34" charset="-122"/>
                 <a:cs typeface="Inter" pitchFamily="34" charset="-120"/>
               </a:rPr>
-              <a:t>UC-05</a:t>
+              <a:t>ZTIC</a:t>
             </a:r>
             <a:endParaRPr lang="en-US" sz="1300" dirty="0"/>
+          </a:p>
+        </p:txBody>
+      </p:sp>
+      <p:sp>
+        <p:nvSpPr>
+          <p:cNvPr id="6" name="Text 4"/>
+          <p:cNvSpPr/>
+          <p:nvPr/>
+        </p:nvSpPr>
+        <p:spPr>
+          <a:xfrm>
+            <a:off x="10168128" y="512064"/>
+            <a:ext cx="1691640" cy="201168"/>
+          </a:xfrm>
+          <a:prstGeom prst="rect">
+            <a:avLst/>
+          </a:prstGeom>
+          <a:noFill/>
+          <a:ln/>
+        </p:spPr>
+        <p:txBody>
+          <a:bodyPr wrap="square" rtlCol="0" anchor="ctr"/>
+          <a:lstStyle/>
+          <a:p>
+            <a:pPr algn="ctr" indent="0" marL="0">
+              <a:buNone/>
+            </a:pPr>
+            <a:r>
+              <a:rPr lang="en-US" sz="750" dirty="0">
+                <a:solidFill>
+                  <a:srgbClr val="94A3B8"/>
+                </a:solidFill>
+                <a:latin typeface="Inter" pitchFamily="34" charset="0"/>
+                <a:ea typeface="Inter" pitchFamily="34" charset="-122"/>
+                <a:cs typeface="Inter" pitchFamily="34" charset="-120"/>
+              </a:rPr>
+              <a:t>TCS Agentic AI · UC-05</a:t>
+            </a:r>
+            <a:endParaRPr lang="en-US" sz="750" dirty="0"/>
           </a:p>
         </p:txBody>
       </p:sp>
@@ -14263,12 +14540,12 @@
         </p:nvSpPr>
         <p:spPr>
           <a:xfrm>
-            <a:off x="10881360" y="256032"/>
-            <a:ext cx="1005840" cy="329184"/>
+            <a:off x="10625328" y="182880"/>
+            <a:ext cx="1234440" cy="310896"/>
           </a:xfrm>
           <a:prstGeom prst="rect">
             <a:avLst>
-              <a:gd name="adj" fmla="val 13889"/>
+              <a:gd name="adj" fmla="val 14706"/>
             </a:avLst>
           </a:prstGeom>
           <a:solidFill>
@@ -14292,9 +14569,48 @@
                 <a:ea typeface="Inter" pitchFamily="34" charset="-122"/>
                 <a:cs typeface="Inter" pitchFamily="34" charset="-120"/>
               </a:rPr>
-              <a:t>UC-05</a:t>
+              <a:t>ZTIC</a:t>
             </a:r>
             <a:endParaRPr lang="en-US" sz="1300" dirty="0"/>
+          </a:p>
+        </p:txBody>
+      </p:sp>
+      <p:sp>
+        <p:nvSpPr>
+          <p:cNvPr id="6" name="Text 4"/>
+          <p:cNvSpPr/>
+          <p:nvPr/>
+        </p:nvSpPr>
+        <p:spPr>
+          <a:xfrm>
+            <a:off x="10168128" y="512064"/>
+            <a:ext cx="1691640" cy="201168"/>
+          </a:xfrm>
+          <a:prstGeom prst="rect">
+            <a:avLst/>
+          </a:prstGeom>
+          <a:noFill/>
+          <a:ln/>
+        </p:spPr>
+        <p:txBody>
+          <a:bodyPr wrap="square" rtlCol="0" anchor="ctr"/>
+          <a:lstStyle/>
+          <a:p>
+            <a:pPr algn="ctr" indent="0" marL="0">
+              <a:buNone/>
+            </a:pPr>
+            <a:r>
+              <a:rPr lang="en-US" sz="750" dirty="0">
+                <a:solidFill>
+                  <a:srgbClr val="94A3B8"/>
+                </a:solidFill>
+                <a:latin typeface="Inter" pitchFamily="34" charset="0"/>
+                <a:ea typeface="Inter" pitchFamily="34" charset="-122"/>
+                <a:cs typeface="Inter" pitchFamily="34" charset="-120"/>
+              </a:rPr>
+              <a:t>TCS Agentic AI · UC-05</a:t>
+            </a:r>
+            <a:endParaRPr lang="en-US" sz="750" dirty="0"/>
           </a:p>
         </p:txBody>
       </p:sp>
@@ -17215,7 +17531,7 @@
       </p:graphicFrame>
       <p:sp>
         <p:nvSpPr>
-          <p:cNvPr id="7" name="Shape 4"/>
+          <p:cNvPr id="8" name="Shape 5"/>
           <p:cNvSpPr/>
           <p:nvPr/>
         </p:nvSpPr>
@@ -17242,7 +17558,7 @@
       </p:sp>
       <p:sp>
         <p:nvSpPr>
-          <p:cNvPr id="8" name="Text 5"/>
+          <p:cNvPr id="9" name="Text 6"/>
           <p:cNvSpPr/>
           <p:nvPr/>
         </p:nvSpPr>
@@ -17281,7 +17597,7 @@
       </p:sp>
       <p:sp>
         <p:nvSpPr>
-          <p:cNvPr id="9" name="Text 6"/>
+          <p:cNvPr id="10" name="Text 7"/>
           <p:cNvSpPr/>
           <p:nvPr/>
         </p:nvSpPr>
@@ -17320,7 +17636,7 @@
       </p:sp>
       <p:sp>
         <p:nvSpPr>
-          <p:cNvPr id="10" name="Shape 7"/>
+          <p:cNvPr id="11" name="Shape 8"/>
           <p:cNvSpPr/>
           <p:nvPr/>
         </p:nvSpPr>
@@ -17347,7 +17663,7 @@
       </p:sp>
       <p:sp>
         <p:nvSpPr>
-          <p:cNvPr id="11" name="Text 8"/>
+          <p:cNvPr id="12" name="Text 9"/>
           <p:cNvSpPr/>
           <p:nvPr/>
         </p:nvSpPr>
@@ -17386,7 +17702,7 @@
       </p:sp>
       <p:sp>
         <p:nvSpPr>
-          <p:cNvPr id="12" name="Text 9"/>
+          <p:cNvPr id="13" name="Text 10"/>
           <p:cNvSpPr/>
           <p:nvPr/>
         </p:nvSpPr>
@@ -17486,7 +17802,46 @@
         </p:nvSpPr>
         <p:spPr>
           <a:xfrm>
-            <a:off x="731520" y="2286000"/>
+            <a:off x="731520" y="2029968"/>
+            <a:ext cx="7315200" cy="274320"/>
+          </a:xfrm>
+          <a:prstGeom prst="rect">
+            <a:avLst/>
+          </a:prstGeom>
+          <a:noFill/>
+          <a:ln/>
+        </p:spPr>
+        <p:txBody>
+          <a:bodyPr wrap="square" rtlCol="0" anchor="ctr"/>
+          <a:lstStyle/>
+          <a:p>
+            <a:pPr indent="0" marL="0">
+              <a:buNone/>
+            </a:pPr>
+            <a:r>
+              <a:rPr lang="en-US" sz="1200" b="1" spc="300" kern="0" dirty="0">
+                <a:solidFill>
+                  <a:srgbClr val="0891B2"/>
+                </a:solidFill>
+                <a:latin typeface="Inter" pitchFamily="34" charset="0"/>
+                <a:ea typeface="Inter" pitchFamily="34" charset="-122"/>
+                <a:cs typeface="Inter" pitchFamily="34" charset="-120"/>
+              </a:rPr>
+              <a:t>TCS AGENTIC AI</a:t>
+            </a:r>
+            <a:endParaRPr lang="en-US" sz="1200" dirty="0"/>
+          </a:p>
+        </p:txBody>
+      </p:sp>
+      <p:sp>
+        <p:nvSpPr>
+          <p:cNvPr id="3" name="Text 1"/>
+          <p:cNvSpPr/>
+          <p:nvPr/>
+        </p:nvSpPr>
+        <p:spPr>
+          <a:xfrm>
+            <a:off x="731520" y="2331720"/>
             <a:ext cx="10607040" cy="640080"/>
           </a:xfrm>
           <a:prstGeom prst="rect">
@@ -17511,7 +17866,7 @@
                 <a:ea typeface="Inter" pitchFamily="34" charset="-122"/>
                 <a:cs typeface="Inter" pitchFamily="34" charset="-120"/>
               </a:rPr>
-              <a:t>UC-05  ·  Zero-Touch Incident Command</a:t>
+              <a:t>Zero-Touch Incident Command</a:t>
             </a:r>
             <a:endParaRPr lang="en-US" sz="3400" dirty="0"/>
           </a:p>
@@ -17519,13 +17874,52 @@
       </p:sp>
       <p:sp>
         <p:nvSpPr>
-          <p:cNvPr id="3" name="Shape 1"/>
-          <p:cNvSpPr/>
-          <p:nvPr/>
-        </p:nvSpPr>
-        <p:spPr>
-          <a:xfrm>
-            <a:off x="731520" y="3063240"/>
+          <p:cNvPr id="4" name="Text 2"/>
+          <p:cNvSpPr/>
+          <p:nvPr/>
+        </p:nvSpPr>
+        <p:spPr>
+          <a:xfrm>
+            <a:off x="731520" y="2944368"/>
+            <a:ext cx="3657600" cy="274320"/>
+          </a:xfrm>
+          <a:prstGeom prst="rect">
+            <a:avLst/>
+          </a:prstGeom>
+          <a:noFill/>
+          <a:ln/>
+        </p:spPr>
+        <p:txBody>
+          <a:bodyPr wrap="square" rtlCol="0" anchor="ctr"/>
+          <a:lstStyle/>
+          <a:p>
+            <a:pPr indent="0" marL="0">
+              <a:buNone/>
+            </a:pPr>
+            <a:r>
+              <a:rPr lang="en-US" sz="1200" dirty="0">
+                <a:solidFill>
+                  <a:srgbClr val="94A3B8"/>
+                </a:solidFill>
+                <a:latin typeface="Inter" pitchFamily="34" charset="0"/>
+                <a:ea typeface="Inter" pitchFamily="34" charset="-122"/>
+                <a:cs typeface="Inter" pitchFamily="34" charset="-120"/>
+              </a:rPr>
+              <a:t>ZTIC  ·  UC-05</a:t>
+            </a:r>
+            <a:endParaRPr lang="en-US" sz="1200" dirty="0"/>
+          </a:p>
+        </p:txBody>
+      </p:sp>
+      <p:sp>
+        <p:nvSpPr>
+          <p:cNvPr id="5" name="Shape 3"/>
+          <p:cNvSpPr/>
+          <p:nvPr/>
+        </p:nvSpPr>
+        <p:spPr>
+          <a:xfrm>
+            <a:off x="731520" y="3273552"/>
             <a:ext cx="2926080" cy="36576"/>
           </a:xfrm>
           <a:prstGeom prst="rect">
@@ -17539,13 +17933,13 @@
       </p:sp>
       <p:sp>
         <p:nvSpPr>
-          <p:cNvPr id="4" name="Text 2"/>
-          <p:cNvSpPr/>
-          <p:nvPr/>
-        </p:nvSpPr>
-        <p:spPr>
-          <a:xfrm>
-            <a:off x="731520" y="3291840"/>
+          <p:cNvPr id="6" name="Text 4"/>
+          <p:cNvSpPr/>
+          <p:nvPr/>
+        </p:nvSpPr>
+        <p:spPr>
+          <a:xfrm>
+            <a:off x="731520" y="3493008"/>
             <a:ext cx="10607040" cy="1737360"/>
           </a:xfrm>
           <a:prstGeom prst="rect">
@@ -17560,12 +17954,12 @@
           <a:p>
             <a:pPr indent="0" marL="0">
               <a:lnSpc>
-                <a:spcPts val="3100"/>
+                <a:spcPts val="3000"/>
               </a:lnSpc>
               <a:buNone/>
             </a:pPr>
             <a:r>
-              <a:rPr lang="en-US" sz="2000" dirty="0">
+              <a:rPr lang="en-US" sz="1900" dirty="0">
                 <a:solidFill>
                   <a:srgbClr val="FEF3C7"/>
                 </a:solidFill>
@@ -17575,17 +17969,17 @@
               </a:rPr>
               <a:t>Nobody opens the ticket.</a:t>
             </a:r>
-            <a:endParaRPr lang="en-US" sz="2000" dirty="0"/>
+            <a:endParaRPr lang="en-US" sz="1900" dirty="0"/>
           </a:p>
           <a:p>
             <a:pPr indent="0" marL="0">
               <a:lnSpc>
-                <a:spcPts val="3100"/>
+                <a:spcPts val="3000"/>
               </a:lnSpc>
               <a:buNone/>
             </a:pPr>
             <a:r>
-              <a:rPr lang="en-US" sz="2000" dirty="0">
+              <a:rPr lang="en-US" sz="1900" dirty="0">
                 <a:solidFill>
                   <a:srgbClr val="FEF3C7"/>
                 </a:solidFill>
@@ -17595,17 +17989,17 @@
               </a:rPr>
               <a:t>Nobody writes the RCA.</a:t>
             </a:r>
-            <a:endParaRPr lang="en-US" sz="2000" dirty="0"/>
+            <a:endParaRPr lang="en-US" sz="1900" dirty="0"/>
           </a:p>
           <a:p>
             <a:pPr indent="0" marL="0">
               <a:lnSpc>
-                <a:spcPts val="3100"/>
+                <a:spcPts val="3000"/>
               </a:lnSpc>
               <a:buNone/>
             </a:pPr>
             <a:r>
-              <a:rPr lang="en-US" sz="2000" dirty="0">
+              <a:rPr lang="en-US" sz="1900" dirty="0">
                 <a:solidFill>
                   <a:srgbClr val="FEF3C7"/>
                 </a:solidFill>
@@ -17615,17 +18009,17 @@
               </a:rPr>
               <a:t>Nobody closes it.</a:t>
             </a:r>
-            <a:endParaRPr lang="en-US" sz="2000" dirty="0"/>
+            <a:endParaRPr lang="en-US" sz="1900" dirty="0"/>
           </a:p>
           <a:p>
             <a:pPr indent="0" marL="0">
               <a:lnSpc>
-                <a:spcPts val="3100"/>
+                <a:spcPts val="3000"/>
               </a:lnSpc>
               <a:buNone/>
             </a:pPr>
             <a:r>
-              <a:rPr lang="en-US" sz="2000" dirty="0">
+              <a:rPr lang="en-US" sz="1900" dirty="0">
                 <a:solidFill>
                   <a:srgbClr val="FEF3C7"/>
                 </a:solidFill>
@@ -17635,13 +18029,13 @@
               </a:rPr>
               <a:t>And every change can be undone.</a:t>
             </a:r>
-            <a:endParaRPr lang="en-US" sz="2000" dirty="0"/>
+            <a:endParaRPr lang="en-US" sz="1900" dirty="0"/>
           </a:p>
         </p:txBody>
       </p:sp>
       <p:sp>
         <p:nvSpPr>
-          <p:cNvPr id="5" name="Text 3"/>
+          <p:cNvPr id="7" name="Text 5"/>
           <p:cNvSpPr/>
           <p:nvPr/>
         </p:nvSpPr>
@@ -17680,13 +18074,13 @@
       </p:sp>
       <p:sp>
         <p:nvSpPr>
-          <p:cNvPr id="6" name="Text 4"/>
-          <p:cNvSpPr/>
-          <p:nvPr/>
-        </p:nvSpPr>
-        <p:spPr>
-          <a:xfrm>
-            <a:off x="731520" y="5852160"/>
+          <p:cNvPr id="8" name="Text 6"/>
+          <p:cNvSpPr/>
+          <p:nvPr/>
+        </p:nvSpPr>
+        <p:spPr>
+          <a:xfrm>
+            <a:off x="731520" y="5943600"/>
             <a:ext cx="10607040" cy="274320"/>
           </a:xfrm>
           <a:prstGeom prst="rect">
@@ -17711,7 +18105,7 @@
                 <a:ea typeface="Inter" pitchFamily="34" charset="-122"/>
                 <a:cs typeface="Inter" pitchFamily="34" charset="-120"/>
               </a:rPr>
-              <a:t>TCS Agentic AI for OpenShift</a:t>
+              <a:t>TCS Agentic AI for OpenShift  ·  Tata Consultancy Services</a:t>
             </a:r>
             <a:endParaRPr lang="en-US" sz="1100" dirty="0"/>
           </a:p>
@@ -17848,12 +18242,12 @@
         </p:nvSpPr>
         <p:spPr>
           <a:xfrm>
-            <a:off x="10881360" y="256032"/>
-            <a:ext cx="1005840" cy="329184"/>
+            <a:off x="10625328" y="182880"/>
+            <a:ext cx="1234440" cy="310896"/>
           </a:xfrm>
           <a:prstGeom prst="rect">
             <a:avLst>
-              <a:gd name="adj" fmla="val 13889"/>
+              <a:gd name="adj" fmla="val 14706"/>
             </a:avLst>
           </a:prstGeom>
           <a:solidFill>
@@ -17877,7 +18271,7 @@
                 <a:ea typeface="Inter" pitchFamily="34" charset="-122"/>
                 <a:cs typeface="Inter" pitchFamily="34" charset="-120"/>
               </a:rPr>
-              <a:t>UC-05</a:t>
+              <a:t>ZTIC</a:t>
             </a:r>
             <a:endParaRPr lang="en-US" sz="1300" dirty="0"/>
           </a:p>
@@ -17885,7 +18279,46 @@
       </p:sp>
       <p:sp>
         <p:nvSpPr>
-          <p:cNvPr id="6" name="Shape 4"/>
+          <p:cNvPr id="6" name="Text 4"/>
+          <p:cNvSpPr/>
+          <p:nvPr/>
+        </p:nvSpPr>
+        <p:spPr>
+          <a:xfrm>
+            <a:off x="10168128" y="512064"/>
+            <a:ext cx="1691640" cy="201168"/>
+          </a:xfrm>
+          <a:prstGeom prst="rect">
+            <a:avLst/>
+          </a:prstGeom>
+          <a:noFill/>
+          <a:ln/>
+        </p:spPr>
+        <p:txBody>
+          <a:bodyPr wrap="square" rtlCol="0" anchor="ctr"/>
+          <a:lstStyle/>
+          <a:p>
+            <a:pPr algn="ctr" indent="0" marL="0">
+              <a:buNone/>
+            </a:pPr>
+            <a:r>
+              <a:rPr lang="en-US" sz="750" dirty="0">
+                <a:solidFill>
+                  <a:srgbClr val="94A3B8"/>
+                </a:solidFill>
+                <a:latin typeface="Inter" pitchFamily="34" charset="0"/>
+                <a:ea typeface="Inter" pitchFamily="34" charset="-122"/>
+                <a:cs typeface="Inter" pitchFamily="34" charset="-120"/>
+              </a:rPr>
+              <a:t>TCS Agentic AI · UC-05</a:t>
+            </a:r>
+            <a:endParaRPr lang="en-US" sz="750" dirty="0"/>
+          </a:p>
+        </p:txBody>
+      </p:sp>
+      <p:sp>
+        <p:nvSpPr>
+          <p:cNvPr id="7" name="Shape 5"/>
           <p:cNvSpPr/>
           <p:nvPr/>
         </p:nvSpPr>
@@ -17912,7 +18345,7 @@
       </p:sp>
       <p:sp>
         <p:nvSpPr>
-          <p:cNvPr id="7" name="Text 5"/>
+          <p:cNvPr id="8" name="Text 6"/>
           <p:cNvSpPr/>
           <p:nvPr/>
         </p:nvSpPr>
@@ -17951,7 +18384,7 @@
       </p:sp>
       <p:sp>
         <p:nvSpPr>
-          <p:cNvPr id="8" name="Text 6"/>
+          <p:cNvPr id="9" name="Text 7"/>
           <p:cNvSpPr/>
           <p:nvPr/>
         </p:nvSpPr>
@@ -17990,7 +18423,7 @@
       </p:sp>
       <p:sp>
         <p:nvSpPr>
-          <p:cNvPr id="9" name="Shape 7"/>
+          <p:cNvPr id="10" name="Shape 8"/>
           <p:cNvSpPr/>
           <p:nvPr/>
         </p:nvSpPr>
@@ -18017,7 +18450,7 @@
       </p:sp>
       <p:sp>
         <p:nvSpPr>
-          <p:cNvPr id="10" name="Text 8"/>
+          <p:cNvPr id="11" name="Text 9"/>
           <p:cNvSpPr/>
           <p:nvPr/>
         </p:nvSpPr>
@@ -18056,7 +18489,7 @@
       </p:sp>
       <p:sp>
         <p:nvSpPr>
-          <p:cNvPr id="11" name="Text 9"/>
+          <p:cNvPr id="12" name="Text 10"/>
           <p:cNvSpPr/>
           <p:nvPr/>
         </p:nvSpPr>
@@ -18095,7 +18528,7 @@
       </p:sp>
       <p:sp>
         <p:nvSpPr>
-          <p:cNvPr id="12" name="Shape 10"/>
+          <p:cNvPr id="13" name="Shape 11"/>
           <p:cNvSpPr/>
           <p:nvPr/>
         </p:nvSpPr>
@@ -18122,7 +18555,7 @@
       </p:sp>
       <p:sp>
         <p:nvSpPr>
-          <p:cNvPr id="13" name="Text 11"/>
+          <p:cNvPr id="14" name="Text 12"/>
           <p:cNvSpPr/>
           <p:nvPr/>
         </p:nvSpPr>
@@ -18161,7 +18594,7 @@
       </p:sp>
       <p:sp>
         <p:nvSpPr>
-          <p:cNvPr id="14" name="Text 12"/>
+          <p:cNvPr id="15" name="Text 13"/>
           <p:cNvSpPr/>
           <p:nvPr/>
         </p:nvSpPr>
@@ -18200,7 +18633,7 @@
       </p:sp>
       <p:sp>
         <p:nvSpPr>
-          <p:cNvPr id="15" name="Shape 13"/>
+          <p:cNvPr id="16" name="Shape 14"/>
           <p:cNvSpPr/>
           <p:nvPr/>
         </p:nvSpPr>
@@ -18227,7 +18660,7 @@
       </p:sp>
       <p:sp>
         <p:nvSpPr>
-          <p:cNvPr id="16" name="Text 14"/>
+          <p:cNvPr id="17" name="Text 15"/>
           <p:cNvSpPr/>
           <p:nvPr/>
         </p:nvSpPr>
@@ -18266,7 +18699,7 @@
       </p:sp>
       <p:sp>
         <p:nvSpPr>
-          <p:cNvPr id="17" name="Text 15"/>
+          <p:cNvPr id="18" name="Text 16"/>
           <p:cNvSpPr/>
           <p:nvPr/>
         </p:nvSpPr>
@@ -18305,7 +18738,7 @@
       </p:sp>
       <p:sp>
         <p:nvSpPr>
-          <p:cNvPr id="18" name="Shape 16"/>
+          <p:cNvPr id="19" name="Shape 17"/>
           <p:cNvSpPr/>
           <p:nvPr/>
         </p:nvSpPr>
@@ -18332,7 +18765,7 @@
       </p:sp>
       <p:sp>
         <p:nvSpPr>
-          <p:cNvPr id="19" name="Text 17"/>
+          <p:cNvPr id="20" name="Text 18"/>
           <p:cNvSpPr/>
           <p:nvPr/>
         </p:nvSpPr>
@@ -18371,7 +18804,7 @@
       </p:sp>
       <p:sp>
         <p:nvSpPr>
-          <p:cNvPr id="20" name="Text 18"/>
+          <p:cNvPr id="21" name="Text 19"/>
           <p:cNvSpPr/>
           <p:nvPr/>
         </p:nvSpPr>
@@ -18410,7 +18843,7 @@
       </p:sp>
       <p:sp>
         <p:nvSpPr>
-          <p:cNvPr id="21" name="Shape 19"/>
+          <p:cNvPr id="22" name="Shape 20"/>
           <p:cNvSpPr/>
           <p:nvPr/>
         </p:nvSpPr>
@@ -18437,7 +18870,7 @@
       </p:sp>
       <p:sp>
         <p:nvSpPr>
-          <p:cNvPr id="22" name="Text 20"/>
+          <p:cNvPr id="23" name="Text 21"/>
           <p:cNvSpPr/>
           <p:nvPr/>
         </p:nvSpPr>
@@ -18476,7 +18909,7 @@
       </p:sp>
       <p:sp>
         <p:nvSpPr>
-          <p:cNvPr id="23" name="Text 21"/>
+          <p:cNvPr id="24" name="Text 22"/>
           <p:cNvSpPr/>
           <p:nvPr/>
         </p:nvSpPr>
@@ -18515,7 +18948,7 @@
       </p:sp>
       <p:sp>
         <p:nvSpPr>
-          <p:cNvPr id="24" name="Text 22"/>
+          <p:cNvPr id="25" name="Text 23"/>
           <p:cNvSpPr/>
           <p:nvPr/>
         </p:nvSpPr>
@@ -18683,12 +19116,12 @@
         </p:nvSpPr>
         <p:spPr>
           <a:xfrm>
-            <a:off x="10881360" y="256032"/>
-            <a:ext cx="1005840" cy="329184"/>
+            <a:off x="10625328" y="182880"/>
+            <a:ext cx="1234440" cy="310896"/>
           </a:xfrm>
           <a:prstGeom prst="rect">
             <a:avLst>
-              <a:gd name="adj" fmla="val 13889"/>
+              <a:gd name="adj" fmla="val 14706"/>
             </a:avLst>
           </a:prstGeom>
           <a:solidFill>
@@ -18712,7 +19145,7 @@
                 <a:ea typeface="Inter" pitchFamily="34" charset="-122"/>
                 <a:cs typeface="Inter" pitchFamily="34" charset="-120"/>
               </a:rPr>
-              <a:t>UC-05</a:t>
+              <a:t>ZTIC</a:t>
             </a:r>
             <a:endParaRPr lang="en-US" sz="1300" dirty="0"/>
           </a:p>
@@ -18721,6 +19154,45 @@
       <p:sp>
         <p:nvSpPr>
           <p:cNvPr id="6" name="Text 4"/>
+          <p:cNvSpPr/>
+          <p:nvPr/>
+        </p:nvSpPr>
+        <p:spPr>
+          <a:xfrm>
+            <a:off x="10168128" y="512064"/>
+            <a:ext cx="1691640" cy="201168"/>
+          </a:xfrm>
+          <a:prstGeom prst="rect">
+            <a:avLst/>
+          </a:prstGeom>
+          <a:noFill/>
+          <a:ln/>
+        </p:spPr>
+        <p:txBody>
+          <a:bodyPr wrap="square" rtlCol="0" anchor="ctr"/>
+          <a:lstStyle/>
+          <a:p>
+            <a:pPr algn="ctr" indent="0" marL="0">
+              <a:buNone/>
+            </a:pPr>
+            <a:r>
+              <a:rPr lang="en-US" sz="750" dirty="0">
+                <a:solidFill>
+                  <a:srgbClr val="94A3B8"/>
+                </a:solidFill>
+                <a:latin typeface="Inter" pitchFamily="34" charset="0"/>
+                <a:ea typeface="Inter" pitchFamily="34" charset="-122"/>
+                <a:cs typeface="Inter" pitchFamily="34" charset="-120"/>
+              </a:rPr>
+              <a:t>TCS Agentic AI · UC-05</a:t>
+            </a:r>
+            <a:endParaRPr lang="en-US" sz="750" dirty="0"/>
+          </a:p>
+        </p:txBody>
+      </p:sp>
+      <p:sp>
+        <p:nvSpPr>
+          <p:cNvPr id="7" name="Text 5"/>
           <p:cNvSpPr/>
           <p:nvPr/>
         </p:nvSpPr>
@@ -18759,7 +19231,7 @@
       </p:sp>
       <p:sp>
         <p:nvSpPr>
-          <p:cNvPr id="7" name="Shape 5"/>
+          <p:cNvPr id="8" name="Shape 6"/>
           <p:cNvSpPr/>
           <p:nvPr/>
         </p:nvSpPr>
@@ -18786,7 +19258,7 @@
       </p:sp>
       <p:sp>
         <p:nvSpPr>
-          <p:cNvPr id="8" name="Text 6"/>
+          <p:cNvPr id="9" name="Text 7"/>
           <p:cNvSpPr/>
           <p:nvPr/>
         </p:nvSpPr>
@@ -18825,7 +19297,7 @@
       </p:sp>
       <p:sp>
         <p:nvSpPr>
-          <p:cNvPr id="9" name="Text 7"/>
+          <p:cNvPr id="10" name="Text 8"/>
           <p:cNvSpPr/>
           <p:nvPr/>
         </p:nvSpPr>
@@ -18881,7 +19353,7 @@
       </p:sp>
       <p:sp>
         <p:nvSpPr>
-          <p:cNvPr id="10" name="Text 8"/>
+          <p:cNvPr id="11" name="Text 9"/>
           <p:cNvSpPr/>
           <p:nvPr/>
         </p:nvSpPr>
@@ -18920,7 +19392,7 @@
       </p:sp>
       <p:sp>
         <p:nvSpPr>
-          <p:cNvPr id="11" name="Shape 9"/>
+          <p:cNvPr id="12" name="Shape 10"/>
           <p:cNvSpPr/>
           <p:nvPr/>
         </p:nvSpPr>
@@ -18947,7 +19419,7 @@
       </p:sp>
       <p:sp>
         <p:nvSpPr>
-          <p:cNvPr id="12" name="Text 10"/>
+          <p:cNvPr id="13" name="Text 11"/>
           <p:cNvSpPr/>
           <p:nvPr/>
         </p:nvSpPr>
@@ -18986,7 +19458,7 @@
       </p:sp>
       <p:sp>
         <p:nvSpPr>
-          <p:cNvPr id="13" name="Text 11"/>
+          <p:cNvPr id="14" name="Text 12"/>
           <p:cNvSpPr/>
           <p:nvPr/>
         </p:nvSpPr>
@@ -19042,7 +19514,7 @@
       </p:sp>
       <p:sp>
         <p:nvSpPr>
-          <p:cNvPr id="14" name="Text 12"/>
+          <p:cNvPr id="15" name="Text 13"/>
           <p:cNvSpPr/>
           <p:nvPr/>
         </p:nvSpPr>
@@ -19081,7 +19553,7 @@
       </p:sp>
       <p:sp>
         <p:nvSpPr>
-          <p:cNvPr id="15" name="Shape 13"/>
+          <p:cNvPr id="16" name="Shape 14"/>
           <p:cNvSpPr/>
           <p:nvPr/>
         </p:nvSpPr>
@@ -19108,7 +19580,7 @@
       </p:sp>
       <p:sp>
         <p:nvSpPr>
-          <p:cNvPr id="16" name="Text 14"/>
+          <p:cNvPr id="17" name="Text 15"/>
           <p:cNvSpPr/>
           <p:nvPr/>
         </p:nvSpPr>
@@ -19147,7 +19619,7 @@
       </p:sp>
       <p:sp>
         <p:nvSpPr>
-          <p:cNvPr id="17" name="Text 15"/>
+          <p:cNvPr id="18" name="Text 16"/>
           <p:cNvSpPr/>
           <p:nvPr/>
         </p:nvSpPr>
@@ -19203,7 +19675,7 @@
       </p:sp>
       <p:sp>
         <p:nvSpPr>
-          <p:cNvPr id="18" name="Text 16"/>
+          <p:cNvPr id="19" name="Text 17"/>
           <p:cNvSpPr/>
           <p:nvPr/>
         </p:nvSpPr>
@@ -19242,7 +19714,7 @@
       </p:sp>
       <p:sp>
         <p:nvSpPr>
-          <p:cNvPr id="19" name="Shape 17"/>
+          <p:cNvPr id="20" name="Shape 18"/>
           <p:cNvSpPr/>
           <p:nvPr/>
         </p:nvSpPr>
@@ -19269,7 +19741,7 @@
       </p:sp>
       <p:sp>
         <p:nvSpPr>
-          <p:cNvPr id="20" name="Text 18"/>
+          <p:cNvPr id="21" name="Text 19"/>
           <p:cNvSpPr/>
           <p:nvPr/>
         </p:nvSpPr>
@@ -19308,7 +19780,7 @@
       </p:sp>
       <p:sp>
         <p:nvSpPr>
-          <p:cNvPr id="21" name="Text 19"/>
+          <p:cNvPr id="22" name="Text 20"/>
           <p:cNvSpPr/>
           <p:nvPr/>
         </p:nvSpPr>
@@ -19364,7 +19836,7 @@
       </p:sp>
       <p:sp>
         <p:nvSpPr>
-          <p:cNvPr id="22" name="Text 20"/>
+          <p:cNvPr id="23" name="Text 21"/>
           <p:cNvSpPr/>
           <p:nvPr/>
         </p:nvSpPr>
@@ -19403,7 +19875,7 @@
       </p:sp>
       <p:sp>
         <p:nvSpPr>
-          <p:cNvPr id="23" name="Shape 21"/>
+          <p:cNvPr id="24" name="Shape 22"/>
           <p:cNvSpPr/>
           <p:nvPr/>
         </p:nvSpPr>
@@ -19430,7 +19902,7 @@
       </p:sp>
       <p:sp>
         <p:nvSpPr>
-          <p:cNvPr id="24" name="Text 22"/>
+          <p:cNvPr id="25" name="Text 23"/>
           <p:cNvSpPr/>
           <p:nvPr/>
         </p:nvSpPr>
@@ -19469,7 +19941,7 @@
       </p:sp>
       <p:sp>
         <p:nvSpPr>
-          <p:cNvPr id="25" name="Text 23"/>
+          <p:cNvPr id="26" name="Text 24"/>
           <p:cNvSpPr/>
           <p:nvPr/>
         </p:nvSpPr>
@@ -19525,7 +19997,7 @@
       </p:sp>
       <p:sp>
         <p:nvSpPr>
-          <p:cNvPr id="26" name="Text 24"/>
+          <p:cNvPr id="27" name="Text 25"/>
           <p:cNvSpPr/>
           <p:nvPr/>
         </p:nvSpPr>
@@ -19564,7 +20036,7 @@
       </p:sp>
       <p:sp>
         <p:nvSpPr>
-          <p:cNvPr id="27" name="Shape 25"/>
+          <p:cNvPr id="28" name="Shape 26"/>
           <p:cNvSpPr/>
           <p:nvPr/>
         </p:nvSpPr>
@@ -19591,7 +20063,7 @@
       </p:sp>
       <p:sp>
         <p:nvSpPr>
-          <p:cNvPr id="28" name="Text 26"/>
+          <p:cNvPr id="29" name="Text 27"/>
           <p:cNvSpPr/>
           <p:nvPr/>
         </p:nvSpPr>
@@ -19630,7 +20102,7 @@
       </p:sp>
       <p:sp>
         <p:nvSpPr>
-          <p:cNvPr id="29" name="Text 27"/>
+          <p:cNvPr id="30" name="Text 28"/>
           <p:cNvSpPr/>
           <p:nvPr/>
         </p:nvSpPr>
@@ -19686,7 +20158,7 @@
       </p:sp>
       <p:sp>
         <p:nvSpPr>
-          <p:cNvPr id="30" name="Shape 28"/>
+          <p:cNvPr id="31" name="Shape 29"/>
           <p:cNvSpPr/>
           <p:nvPr/>
         </p:nvSpPr>
@@ -19713,7 +20185,7 @@
       </p:sp>
       <p:sp>
         <p:nvSpPr>
-          <p:cNvPr id="31" name="Text 29"/>
+          <p:cNvPr id="32" name="Text 30"/>
           <p:cNvSpPr/>
           <p:nvPr/>
         </p:nvSpPr>
@@ -19752,7 +20224,7 @@
       </p:sp>
       <p:sp>
         <p:nvSpPr>
-          <p:cNvPr id="32" name="Shape 30"/>
+          <p:cNvPr id="33" name="Shape 31"/>
           <p:cNvSpPr/>
           <p:nvPr/>
         </p:nvSpPr>
@@ -19779,7 +20251,7 @@
       </p:sp>
       <p:sp>
         <p:nvSpPr>
-          <p:cNvPr id="33" name="Text 31"/>
+          <p:cNvPr id="34" name="Text 32"/>
           <p:cNvSpPr/>
           <p:nvPr/>
         </p:nvSpPr>
@@ -19818,7 +20290,7 @@
       </p:sp>
       <p:sp>
         <p:nvSpPr>
-          <p:cNvPr id="34" name="Text 32"/>
+          <p:cNvPr id="35" name="Text 33"/>
           <p:cNvSpPr/>
           <p:nvPr/>
         </p:nvSpPr>
@@ -19857,7 +20329,7 @@
       </p:sp>
       <p:sp>
         <p:nvSpPr>
-          <p:cNvPr id="35" name="Text 33"/>
+          <p:cNvPr id="36" name="Text 34"/>
           <p:cNvSpPr/>
           <p:nvPr/>
         </p:nvSpPr>
@@ -19896,7 +20368,7 @@
       </p:sp>
       <p:sp>
         <p:nvSpPr>
-          <p:cNvPr id="36" name="Shape 34"/>
+          <p:cNvPr id="37" name="Shape 35"/>
           <p:cNvSpPr/>
           <p:nvPr/>
         </p:nvSpPr>
@@ -19923,7 +20395,7 @@
       </p:sp>
       <p:sp>
         <p:nvSpPr>
-          <p:cNvPr id="37" name="Text 35"/>
+          <p:cNvPr id="38" name="Text 36"/>
           <p:cNvSpPr/>
           <p:nvPr/>
         </p:nvSpPr>
@@ -19962,7 +20434,7 @@
       </p:sp>
       <p:sp>
         <p:nvSpPr>
-          <p:cNvPr id="38" name="Text 36"/>
+          <p:cNvPr id="39" name="Text 37"/>
           <p:cNvSpPr/>
           <p:nvPr/>
         </p:nvSpPr>
@@ -20018,7 +20490,7 @@
       </p:sp>
       <p:sp>
         <p:nvSpPr>
-          <p:cNvPr id="39" name="Text 37"/>
+          <p:cNvPr id="40" name="Text 38"/>
           <p:cNvSpPr/>
           <p:nvPr/>
         </p:nvSpPr>
@@ -20057,7 +20529,7 @@
       </p:sp>
       <p:sp>
         <p:nvSpPr>
-          <p:cNvPr id="40" name="Shape 38"/>
+          <p:cNvPr id="41" name="Shape 39"/>
           <p:cNvSpPr/>
           <p:nvPr/>
         </p:nvSpPr>
@@ -20084,7 +20556,7 @@
       </p:sp>
       <p:sp>
         <p:nvSpPr>
-          <p:cNvPr id="41" name="Text 39"/>
+          <p:cNvPr id="42" name="Text 40"/>
           <p:cNvSpPr/>
           <p:nvPr/>
         </p:nvSpPr>
@@ -20123,7 +20595,7 @@
       </p:sp>
       <p:sp>
         <p:nvSpPr>
-          <p:cNvPr id="42" name="Text 40"/>
+          <p:cNvPr id="43" name="Text 41"/>
           <p:cNvSpPr/>
           <p:nvPr/>
         </p:nvSpPr>
@@ -20179,7 +20651,7 @@
       </p:sp>
       <p:sp>
         <p:nvSpPr>
-          <p:cNvPr id="43" name="Text 41"/>
+          <p:cNvPr id="44" name="Text 42"/>
           <p:cNvSpPr/>
           <p:nvPr/>
         </p:nvSpPr>
@@ -20218,7 +20690,7 @@
       </p:sp>
       <p:sp>
         <p:nvSpPr>
-          <p:cNvPr id="44" name="Shape 42"/>
+          <p:cNvPr id="45" name="Shape 43"/>
           <p:cNvSpPr/>
           <p:nvPr/>
         </p:nvSpPr>
@@ -20245,7 +20717,7 @@
       </p:sp>
       <p:sp>
         <p:nvSpPr>
-          <p:cNvPr id="45" name="Text 43"/>
+          <p:cNvPr id="46" name="Text 44"/>
           <p:cNvSpPr/>
           <p:nvPr/>
         </p:nvSpPr>
@@ -20284,7 +20756,7 @@
       </p:sp>
       <p:sp>
         <p:nvSpPr>
-          <p:cNvPr id="46" name="Text 44"/>
+          <p:cNvPr id="47" name="Text 45"/>
           <p:cNvSpPr/>
           <p:nvPr/>
         </p:nvSpPr>
@@ -20340,7 +20812,7 @@
       </p:sp>
       <p:sp>
         <p:nvSpPr>
-          <p:cNvPr id="47" name="Shape 45"/>
+          <p:cNvPr id="48" name="Shape 46"/>
           <p:cNvSpPr/>
           <p:nvPr/>
         </p:nvSpPr>
@@ -20367,7 +20839,7 @@
       </p:sp>
       <p:sp>
         <p:nvSpPr>
-          <p:cNvPr id="48" name="Text 46"/>
+          <p:cNvPr id="49" name="Text 47"/>
           <p:cNvSpPr/>
           <p:nvPr/>
         </p:nvSpPr>
@@ -20406,7 +20878,7 @@
       </p:sp>
       <p:sp>
         <p:nvSpPr>
-          <p:cNvPr id="49" name="Shape 47"/>
+          <p:cNvPr id="50" name="Shape 48"/>
           <p:cNvSpPr/>
           <p:nvPr/>
         </p:nvSpPr>
@@ -20433,7 +20905,7 @@
       </p:sp>
       <p:sp>
         <p:nvSpPr>
-          <p:cNvPr id="50" name="Text 48"/>
+          <p:cNvPr id="51" name="Text 49"/>
           <p:cNvSpPr/>
           <p:nvPr/>
         </p:nvSpPr>
@@ -20472,7 +20944,7 @@
       </p:sp>
       <p:sp>
         <p:nvSpPr>
-          <p:cNvPr id="51" name="Shape 49"/>
+          <p:cNvPr id="52" name="Shape 50"/>
           <p:cNvSpPr/>
           <p:nvPr/>
         </p:nvSpPr>
@@ -20499,7 +20971,7 @@
       </p:sp>
       <p:sp>
         <p:nvSpPr>
-          <p:cNvPr id="52" name="Text 50"/>
+          <p:cNvPr id="53" name="Text 51"/>
           <p:cNvSpPr/>
           <p:nvPr/>
         </p:nvSpPr>
@@ -20538,7 +21010,7 @@
       </p:sp>
       <p:sp>
         <p:nvSpPr>
-          <p:cNvPr id="53" name="Text 51"/>
+          <p:cNvPr id="54" name="Text 52"/>
           <p:cNvSpPr/>
           <p:nvPr/>
         </p:nvSpPr>
@@ -20706,12 +21178,12 @@
         </p:nvSpPr>
         <p:spPr>
           <a:xfrm>
-            <a:off x="10881360" y="256032"/>
-            <a:ext cx="1005840" cy="329184"/>
+            <a:off x="10625328" y="182880"/>
+            <a:ext cx="1234440" cy="310896"/>
           </a:xfrm>
           <a:prstGeom prst="rect">
             <a:avLst>
-              <a:gd name="adj" fmla="val 13889"/>
+              <a:gd name="adj" fmla="val 14706"/>
             </a:avLst>
           </a:prstGeom>
           <a:solidFill>
@@ -20735,7 +21207,7 @@
                 <a:ea typeface="Inter" pitchFamily="34" charset="-122"/>
                 <a:cs typeface="Inter" pitchFamily="34" charset="-120"/>
               </a:rPr>
-              <a:t>UC-05</a:t>
+              <a:t>ZTIC</a:t>
             </a:r>
             <a:endParaRPr lang="en-US" sz="1300" dirty="0"/>
           </a:p>
@@ -20744,6 +21216,45 @@
       <p:sp>
         <p:nvSpPr>
           <p:cNvPr id="6" name="Text 4"/>
+          <p:cNvSpPr/>
+          <p:nvPr/>
+        </p:nvSpPr>
+        <p:spPr>
+          <a:xfrm>
+            <a:off x="10168128" y="512064"/>
+            <a:ext cx="1691640" cy="201168"/>
+          </a:xfrm>
+          <a:prstGeom prst="rect">
+            <a:avLst/>
+          </a:prstGeom>
+          <a:noFill/>
+          <a:ln/>
+        </p:spPr>
+        <p:txBody>
+          <a:bodyPr wrap="square" rtlCol="0" anchor="ctr"/>
+          <a:lstStyle/>
+          <a:p>
+            <a:pPr algn="ctr" indent="0" marL="0">
+              <a:buNone/>
+            </a:pPr>
+            <a:r>
+              <a:rPr lang="en-US" sz="750" dirty="0">
+                <a:solidFill>
+                  <a:srgbClr val="94A3B8"/>
+                </a:solidFill>
+                <a:latin typeface="Inter" pitchFamily="34" charset="0"/>
+                <a:ea typeface="Inter" pitchFamily="34" charset="-122"/>
+                <a:cs typeface="Inter" pitchFamily="34" charset="-120"/>
+              </a:rPr>
+              <a:t>TCS Agentic AI · UC-05</a:t>
+            </a:r>
+            <a:endParaRPr lang="en-US" sz="750" dirty="0"/>
+          </a:p>
+        </p:txBody>
+      </p:sp>
+      <p:sp>
+        <p:nvSpPr>
+          <p:cNvPr id="7" name="Text 5"/>
           <p:cNvSpPr/>
           <p:nvPr/>
         </p:nvSpPr>
@@ -20782,7 +21293,7 @@
       </p:sp>
       <p:sp>
         <p:nvSpPr>
-          <p:cNvPr id="7" name="Shape 5"/>
+          <p:cNvPr id="8" name="Shape 6"/>
           <p:cNvSpPr/>
           <p:nvPr/>
         </p:nvSpPr>
@@ -20809,7 +21320,7 @@
       </p:sp>
       <p:sp>
         <p:nvSpPr>
-          <p:cNvPr id="8" name="Text 6"/>
+          <p:cNvPr id="9" name="Text 7"/>
           <p:cNvSpPr/>
           <p:nvPr/>
         </p:nvSpPr>
@@ -20848,7 +21359,7 @@
       </p:sp>
       <p:sp>
         <p:nvSpPr>
-          <p:cNvPr id="9" name="Shape 7"/>
+          <p:cNvPr id="10" name="Shape 8"/>
           <p:cNvSpPr/>
           <p:nvPr/>
         </p:nvSpPr>
@@ -20875,7 +21386,7 @@
       </p:sp>
       <p:sp>
         <p:nvSpPr>
-          <p:cNvPr id="10" name="Text 8"/>
+          <p:cNvPr id="11" name="Text 9"/>
           <p:cNvSpPr/>
           <p:nvPr/>
         </p:nvSpPr>
@@ -20914,7 +21425,7 @@
       </p:sp>
       <p:sp>
         <p:nvSpPr>
-          <p:cNvPr id="11" name="Shape 9"/>
+          <p:cNvPr id="12" name="Shape 10"/>
           <p:cNvSpPr/>
           <p:nvPr/>
         </p:nvSpPr>
@@ -20941,7 +21452,7 @@
       </p:sp>
       <p:sp>
         <p:nvSpPr>
-          <p:cNvPr id="12" name="Text 10"/>
+          <p:cNvPr id="13" name="Text 11"/>
           <p:cNvSpPr/>
           <p:nvPr/>
         </p:nvSpPr>
@@ -20980,7 +21491,7 @@
       </p:sp>
       <p:sp>
         <p:nvSpPr>
-          <p:cNvPr id="13" name="Shape 11"/>
+          <p:cNvPr id="14" name="Shape 12"/>
           <p:cNvSpPr/>
           <p:nvPr/>
         </p:nvSpPr>
@@ -21007,7 +21518,7 @@
       </p:sp>
       <p:sp>
         <p:nvSpPr>
-          <p:cNvPr id="14" name="Text 12"/>
+          <p:cNvPr id="15" name="Text 13"/>
           <p:cNvSpPr/>
           <p:nvPr/>
         </p:nvSpPr>
@@ -21046,7 +21557,7 @@
       </p:sp>
       <p:sp>
         <p:nvSpPr>
-          <p:cNvPr id="15" name="Shape 13"/>
+          <p:cNvPr id="16" name="Shape 14"/>
           <p:cNvSpPr/>
           <p:nvPr/>
         </p:nvSpPr>
@@ -21073,7 +21584,7 @@
       </p:sp>
       <p:sp>
         <p:nvSpPr>
-          <p:cNvPr id="16" name="Text 14"/>
+          <p:cNvPr id="17" name="Text 15"/>
           <p:cNvSpPr/>
           <p:nvPr/>
         </p:nvSpPr>
@@ -21112,7 +21623,7 @@
       </p:sp>
       <p:sp>
         <p:nvSpPr>
-          <p:cNvPr id="17" name="Shape 15"/>
+          <p:cNvPr id="18" name="Shape 16"/>
           <p:cNvSpPr/>
           <p:nvPr/>
         </p:nvSpPr>
@@ -21139,7 +21650,7 @@
       </p:sp>
       <p:sp>
         <p:nvSpPr>
-          <p:cNvPr id="18" name="Text 16"/>
+          <p:cNvPr id="19" name="Text 17"/>
           <p:cNvSpPr/>
           <p:nvPr/>
         </p:nvSpPr>
@@ -21178,7 +21689,7 @@
       </p:sp>
       <p:sp>
         <p:nvSpPr>
-          <p:cNvPr id="19" name="Shape 17"/>
+          <p:cNvPr id="20" name="Shape 18"/>
           <p:cNvSpPr/>
           <p:nvPr/>
         </p:nvSpPr>
@@ -21205,7 +21716,7 @@
       </p:sp>
       <p:sp>
         <p:nvSpPr>
-          <p:cNvPr id="20" name="Text 18"/>
+          <p:cNvPr id="21" name="Text 19"/>
           <p:cNvSpPr/>
           <p:nvPr/>
         </p:nvSpPr>
@@ -21244,7 +21755,7 @@
       </p:sp>
       <p:sp>
         <p:nvSpPr>
-          <p:cNvPr id="21" name="Text 19"/>
+          <p:cNvPr id="22" name="Text 20"/>
           <p:cNvSpPr/>
           <p:nvPr/>
         </p:nvSpPr>
@@ -21283,7 +21794,7 @@
       </p:sp>
       <p:sp>
         <p:nvSpPr>
-          <p:cNvPr id="22" name="Shape 20"/>
+          <p:cNvPr id="23" name="Shape 21"/>
           <p:cNvSpPr/>
           <p:nvPr/>
         </p:nvSpPr>
@@ -21310,7 +21821,7 @@
       </p:sp>
       <p:sp>
         <p:nvSpPr>
-          <p:cNvPr id="23" name="Text 21"/>
+          <p:cNvPr id="24" name="Text 22"/>
           <p:cNvSpPr/>
           <p:nvPr/>
         </p:nvSpPr>
@@ -21349,7 +21860,7 @@
       </p:sp>
       <p:sp>
         <p:nvSpPr>
-          <p:cNvPr id="24" name="Shape 22"/>
+          <p:cNvPr id="25" name="Shape 23"/>
           <p:cNvSpPr/>
           <p:nvPr/>
         </p:nvSpPr>
@@ -21376,7 +21887,7 @@
       </p:sp>
       <p:sp>
         <p:nvSpPr>
-          <p:cNvPr id="25" name="Text 23"/>
+          <p:cNvPr id="26" name="Text 24"/>
           <p:cNvSpPr/>
           <p:nvPr/>
         </p:nvSpPr>
@@ -21415,7 +21926,7 @@
       </p:sp>
       <p:sp>
         <p:nvSpPr>
-          <p:cNvPr id="26" name="Shape 24"/>
+          <p:cNvPr id="27" name="Shape 25"/>
           <p:cNvSpPr/>
           <p:nvPr/>
         </p:nvSpPr>
@@ -21442,7 +21953,7 @@
       </p:sp>
       <p:sp>
         <p:nvSpPr>
-          <p:cNvPr id="27" name="Text 25"/>
+          <p:cNvPr id="28" name="Text 26"/>
           <p:cNvSpPr/>
           <p:nvPr/>
         </p:nvSpPr>
@@ -21481,7 +21992,7 @@
       </p:sp>
       <p:sp>
         <p:nvSpPr>
-          <p:cNvPr id="28" name="Shape 26"/>
+          <p:cNvPr id="29" name="Shape 27"/>
           <p:cNvSpPr/>
           <p:nvPr/>
         </p:nvSpPr>
@@ -21508,7 +22019,7 @@
       </p:sp>
       <p:sp>
         <p:nvSpPr>
-          <p:cNvPr id="29" name="Text 27"/>
+          <p:cNvPr id="30" name="Text 28"/>
           <p:cNvSpPr/>
           <p:nvPr/>
         </p:nvSpPr>
@@ -21547,7 +22058,7 @@
       </p:sp>
       <p:sp>
         <p:nvSpPr>
-          <p:cNvPr id="30" name="Shape 28"/>
+          <p:cNvPr id="31" name="Shape 29"/>
           <p:cNvSpPr/>
           <p:nvPr/>
         </p:nvSpPr>
@@ -21574,7 +22085,7 @@
       </p:sp>
       <p:sp>
         <p:nvSpPr>
-          <p:cNvPr id="31" name="Text 29"/>
+          <p:cNvPr id="32" name="Text 30"/>
           <p:cNvSpPr/>
           <p:nvPr/>
         </p:nvSpPr>
@@ -21613,7 +22124,7 @@
       </p:sp>
       <p:sp>
         <p:nvSpPr>
-          <p:cNvPr id="32" name="Shape 30"/>
+          <p:cNvPr id="33" name="Shape 31"/>
           <p:cNvSpPr/>
           <p:nvPr/>
         </p:nvSpPr>
@@ -21640,7 +22151,7 @@
       </p:sp>
       <p:sp>
         <p:nvSpPr>
-          <p:cNvPr id="33" name="Text 31"/>
+          <p:cNvPr id="34" name="Text 32"/>
           <p:cNvSpPr/>
           <p:nvPr/>
         </p:nvSpPr>
@@ -21679,7 +22190,7 @@
       </p:sp>
       <p:sp>
         <p:nvSpPr>
-          <p:cNvPr id="34" name="Shape 32"/>
+          <p:cNvPr id="35" name="Shape 33"/>
           <p:cNvSpPr/>
           <p:nvPr/>
         </p:nvSpPr>
@@ -21706,7 +22217,7 @@
       </p:sp>
       <p:sp>
         <p:nvSpPr>
-          <p:cNvPr id="35" name="Text 33"/>
+          <p:cNvPr id="36" name="Text 34"/>
           <p:cNvSpPr/>
           <p:nvPr/>
         </p:nvSpPr>
@@ -21745,7 +22256,7 @@
       </p:sp>
       <p:sp>
         <p:nvSpPr>
-          <p:cNvPr id="36" name="Text 34"/>
+          <p:cNvPr id="37" name="Text 35"/>
           <p:cNvSpPr/>
           <p:nvPr/>
         </p:nvSpPr>
@@ -21913,12 +22424,12 @@
         </p:nvSpPr>
         <p:spPr>
           <a:xfrm>
-            <a:off x="10881360" y="256032"/>
-            <a:ext cx="1005840" cy="329184"/>
+            <a:off x="10625328" y="182880"/>
+            <a:ext cx="1234440" cy="310896"/>
           </a:xfrm>
           <a:prstGeom prst="rect">
             <a:avLst>
-              <a:gd name="adj" fmla="val 13889"/>
+              <a:gd name="adj" fmla="val 14706"/>
             </a:avLst>
           </a:prstGeom>
           <a:solidFill>
@@ -21942,7 +22453,7 @@
                 <a:ea typeface="Inter" pitchFamily="34" charset="-122"/>
                 <a:cs typeface="Inter" pitchFamily="34" charset="-120"/>
               </a:rPr>
-              <a:t>UC-05</a:t>
+              <a:t>ZTIC</a:t>
             </a:r>
             <a:endParaRPr lang="en-US" sz="1300" dirty="0"/>
           </a:p>
@@ -21951,6 +22462,45 @@
       <p:sp>
         <p:nvSpPr>
           <p:cNvPr id="6" name="Text 4"/>
+          <p:cNvSpPr/>
+          <p:nvPr/>
+        </p:nvSpPr>
+        <p:spPr>
+          <a:xfrm>
+            <a:off x="10168128" y="512064"/>
+            <a:ext cx="1691640" cy="201168"/>
+          </a:xfrm>
+          <a:prstGeom prst="rect">
+            <a:avLst/>
+          </a:prstGeom>
+          <a:noFill/>
+          <a:ln/>
+        </p:spPr>
+        <p:txBody>
+          <a:bodyPr wrap="square" rtlCol="0" anchor="ctr"/>
+          <a:lstStyle/>
+          <a:p>
+            <a:pPr algn="ctr" indent="0" marL="0">
+              <a:buNone/>
+            </a:pPr>
+            <a:r>
+              <a:rPr lang="en-US" sz="750" dirty="0">
+                <a:solidFill>
+                  <a:srgbClr val="94A3B8"/>
+                </a:solidFill>
+                <a:latin typeface="Inter" pitchFamily="34" charset="0"/>
+                <a:ea typeface="Inter" pitchFamily="34" charset="-122"/>
+                <a:cs typeface="Inter" pitchFamily="34" charset="-120"/>
+              </a:rPr>
+              <a:t>TCS Agentic AI · UC-05</a:t>
+            </a:r>
+            <a:endParaRPr lang="en-US" sz="750" dirty="0"/>
+          </a:p>
+        </p:txBody>
+      </p:sp>
+      <p:sp>
+        <p:nvSpPr>
+          <p:cNvPr id="7" name="Text 5"/>
           <p:cNvSpPr/>
           <p:nvPr/>
         </p:nvSpPr>
@@ -25712,12 +26262,12 @@
         </p:nvSpPr>
         <p:spPr>
           <a:xfrm>
-            <a:off x="10881360" y="256032"/>
-            <a:ext cx="1005840" cy="329184"/>
+            <a:off x="10625328" y="182880"/>
+            <a:ext cx="1234440" cy="310896"/>
           </a:xfrm>
           <a:prstGeom prst="rect">
             <a:avLst>
-              <a:gd name="adj" fmla="val 13889"/>
+              <a:gd name="adj" fmla="val 14706"/>
             </a:avLst>
           </a:prstGeom>
           <a:solidFill>
@@ -25741,7 +26291,7 @@
                 <a:ea typeface="Inter" pitchFamily="34" charset="-122"/>
                 <a:cs typeface="Inter" pitchFamily="34" charset="-120"/>
               </a:rPr>
-              <a:t>UC-05</a:t>
+              <a:t>ZTIC</a:t>
             </a:r>
             <a:endParaRPr lang="en-US" sz="1300" dirty="0"/>
           </a:p>
@@ -25750,6 +26300,45 @@
       <p:sp>
         <p:nvSpPr>
           <p:cNvPr id="6" name="Text 4"/>
+          <p:cNvSpPr/>
+          <p:nvPr/>
+        </p:nvSpPr>
+        <p:spPr>
+          <a:xfrm>
+            <a:off x="10168128" y="512064"/>
+            <a:ext cx="1691640" cy="201168"/>
+          </a:xfrm>
+          <a:prstGeom prst="rect">
+            <a:avLst/>
+          </a:prstGeom>
+          <a:noFill/>
+          <a:ln/>
+        </p:spPr>
+        <p:txBody>
+          <a:bodyPr wrap="square" rtlCol="0" anchor="ctr"/>
+          <a:lstStyle/>
+          <a:p>
+            <a:pPr algn="ctr" indent="0" marL="0">
+              <a:buNone/>
+            </a:pPr>
+            <a:r>
+              <a:rPr lang="en-US" sz="750" dirty="0">
+                <a:solidFill>
+                  <a:srgbClr val="94A3B8"/>
+                </a:solidFill>
+                <a:latin typeface="Inter" pitchFamily="34" charset="0"/>
+                <a:ea typeface="Inter" pitchFamily="34" charset="-122"/>
+                <a:cs typeface="Inter" pitchFamily="34" charset="-120"/>
+              </a:rPr>
+              <a:t>TCS Agentic AI · UC-05</a:t>
+            </a:r>
+            <a:endParaRPr lang="en-US" sz="750" dirty="0"/>
+          </a:p>
+        </p:txBody>
+      </p:sp>
+      <p:sp>
+        <p:nvSpPr>
+          <p:cNvPr id="7" name="Text 5"/>
           <p:cNvSpPr/>
           <p:nvPr/>
         </p:nvSpPr>
@@ -28497,7 +29086,7 @@
       </p:graphicFrame>
       <p:sp>
         <p:nvSpPr>
-          <p:cNvPr id="8" name="Shape 5"/>
+          <p:cNvPr id="9" name="Shape 6"/>
           <p:cNvSpPr/>
           <p:nvPr/>
         </p:nvSpPr>
@@ -28524,7 +29113,7 @@
       </p:sp>
       <p:sp>
         <p:nvSpPr>
-          <p:cNvPr id="9" name="Text 6"/>
+          <p:cNvPr id="10" name="Text 7"/>
           <p:cNvSpPr/>
           <p:nvPr/>
         </p:nvSpPr>
@@ -28563,7 +29152,7 @@
       </p:sp>
       <p:sp>
         <p:nvSpPr>
-          <p:cNvPr id="10" name="Text 7"/>
+          <p:cNvPr id="11" name="Text 8"/>
           <p:cNvSpPr/>
           <p:nvPr/>
         </p:nvSpPr>
@@ -28731,12 +29320,12 @@
         </p:nvSpPr>
         <p:spPr>
           <a:xfrm>
-            <a:off x="10881360" y="256032"/>
-            <a:ext cx="1005840" cy="329184"/>
+            <a:off x="10625328" y="182880"/>
+            <a:ext cx="1234440" cy="310896"/>
           </a:xfrm>
           <a:prstGeom prst="rect">
             <a:avLst>
-              <a:gd name="adj" fmla="val 13889"/>
+              <a:gd name="adj" fmla="val 14706"/>
             </a:avLst>
           </a:prstGeom>
           <a:solidFill>
@@ -28760,7 +29349,7 @@
                 <a:ea typeface="Inter" pitchFamily="34" charset="-122"/>
                 <a:cs typeface="Inter" pitchFamily="34" charset="-120"/>
               </a:rPr>
-              <a:t>UC-05</a:t>
+              <a:t>ZTIC</a:t>
             </a:r>
             <a:endParaRPr lang="en-US" sz="1300" dirty="0"/>
           </a:p>
@@ -28769,6 +29358,45 @@
       <p:sp>
         <p:nvSpPr>
           <p:cNvPr id="6" name="Text 4"/>
+          <p:cNvSpPr/>
+          <p:nvPr/>
+        </p:nvSpPr>
+        <p:spPr>
+          <a:xfrm>
+            <a:off x="10168128" y="512064"/>
+            <a:ext cx="1691640" cy="201168"/>
+          </a:xfrm>
+          <a:prstGeom prst="rect">
+            <a:avLst/>
+          </a:prstGeom>
+          <a:noFill/>
+          <a:ln/>
+        </p:spPr>
+        <p:txBody>
+          <a:bodyPr wrap="square" rtlCol="0" anchor="ctr"/>
+          <a:lstStyle/>
+          <a:p>
+            <a:pPr algn="ctr" indent="0" marL="0">
+              <a:buNone/>
+            </a:pPr>
+            <a:r>
+              <a:rPr lang="en-US" sz="750" dirty="0">
+                <a:solidFill>
+                  <a:srgbClr val="94A3B8"/>
+                </a:solidFill>
+                <a:latin typeface="Inter" pitchFamily="34" charset="0"/>
+                <a:ea typeface="Inter" pitchFamily="34" charset="-122"/>
+                <a:cs typeface="Inter" pitchFamily="34" charset="-120"/>
+              </a:rPr>
+              <a:t>TCS Agentic AI · UC-05</a:t>
+            </a:r>
+            <a:endParaRPr lang="en-US" sz="750" dirty="0"/>
+          </a:p>
+        </p:txBody>
+      </p:sp>
+      <p:sp>
+        <p:nvSpPr>
+          <p:cNvPr id="7" name="Text 5"/>
           <p:cNvSpPr/>
           <p:nvPr/>
         </p:nvSpPr>
@@ -28807,7 +29435,7 @@
       </p:sp>
       <p:sp>
         <p:nvSpPr>
-          <p:cNvPr id="7" name="Shape 5"/>
+          <p:cNvPr id="8" name="Shape 6"/>
           <p:cNvSpPr/>
           <p:nvPr/>
         </p:nvSpPr>
@@ -28834,7 +29462,7 @@
       </p:sp>
       <p:sp>
         <p:nvSpPr>
-          <p:cNvPr id="8" name="Text 6"/>
+          <p:cNvPr id="9" name="Text 7"/>
           <p:cNvSpPr/>
           <p:nvPr/>
         </p:nvSpPr>
@@ -28873,7 +29501,7 @@
       </p:sp>
       <p:sp>
         <p:nvSpPr>
-          <p:cNvPr id="9" name="Text 7"/>
+          <p:cNvPr id="10" name="Text 8"/>
           <p:cNvSpPr/>
           <p:nvPr/>
         </p:nvSpPr>
@@ -28912,7 +29540,7 @@
       </p:sp>
       <p:sp>
         <p:nvSpPr>
-          <p:cNvPr id="10" name="Text 8"/>
+          <p:cNvPr id="11" name="Text 9"/>
           <p:cNvSpPr/>
           <p:nvPr/>
         </p:nvSpPr>
@@ -28968,7 +29596,7 @@
       </p:sp>
       <p:sp>
         <p:nvSpPr>
-          <p:cNvPr id="11" name="Text 9"/>
+          <p:cNvPr id="12" name="Text 10"/>
           <p:cNvSpPr/>
           <p:nvPr/>
         </p:nvSpPr>
@@ -29007,7 +29635,7 @@
       </p:sp>
       <p:sp>
         <p:nvSpPr>
-          <p:cNvPr id="12" name="Shape 10"/>
+          <p:cNvPr id="13" name="Shape 11"/>
           <p:cNvSpPr/>
           <p:nvPr/>
         </p:nvSpPr>
@@ -29034,7 +29662,7 @@
       </p:sp>
       <p:sp>
         <p:nvSpPr>
-          <p:cNvPr id="13" name="Text 11"/>
+          <p:cNvPr id="14" name="Text 12"/>
           <p:cNvSpPr/>
           <p:nvPr/>
         </p:nvSpPr>
@@ -29073,7 +29701,7 @@
       </p:sp>
       <p:sp>
         <p:nvSpPr>
-          <p:cNvPr id="14" name="Text 12"/>
+          <p:cNvPr id="15" name="Text 13"/>
           <p:cNvSpPr/>
           <p:nvPr/>
         </p:nvSpPr>
@@ -29112,7 +29740,7 @@
       </p:sp>
       <p:sp>
         <p:nvSpPr>
-          <p:cNvPr id="15" name="Text 13"/>
+          <p:cNvPr id="16" name="Text 14"/>
           <p:cNvSpPr/>
           <p:nvPr/>
         </p:nvSpPr>
@@ -29168,7 +29796,7 @@
       </p:sp>
       <p:sp>
         <p:nvSpPr>
-          <p:cNvPr id="16" name="Text 14"/>
+          <p:cNvPr id="17" name="Text 15"/>
           <p:cNvSpPr/>
           <p:nvPr/>
         </p:nvSpPr>
@@ -29207,7 +29835,7 @@
       </p:sp>
       <p:sp>
         <p:nvSpPr>
-          <p:cNvPr id="17" name="Shape 15"/>
+          <p:cNvPr id="18" name="Shape 16"/>
           <p:cNvSpPr/>
           <p:nvPr/>
         </p:nvSpPr>
@@ -29234,7 +29862,7 @@
       </p:sp>
       <p:sp>
         <p:nvSpPr>
-          <p:cNvPr id="18" name="Text 16"/>
+          <p:cNvPr id="19" name="Text 17"/>
           <p:cNvSpPr/>
           <p:nvPr/>
         </p:nvSpPr>
@@ -29273,7 +29901,7 @@
       </p:sp>
       <p:sp>
         <p:nvSpPr>
-          <p:cNvPr id="19" name="Text 17"/>
+          <p:cNvPr id="20" name="Text 18"/>
           <p:cNvSpPr/>
           <p:nvPr/>
         </p:nvSpPr>
@@ -29312,7 +29940,7 @@
       </p:sp>
       <p:sp>
         <p:nvSpPr>
-          <p:cNvPr id="20" name="Text 18"/>
+          <p:cNvPr id="21" name="Text 19"/>
           <p:cNvSpPr/>
           <p:nvPr/>
         </p:nvSpPr>
@@ -29368,7 +29996,7 @@
       </p:sp>
       <p:sp>
         <p:nvSpPr>
-          <p:cNvPr id="21" name="Shape 19"/>
+          <p:cNvPr id="22" name="Shape 20"/>
           <p:cNvSpPr/>
           <p:nvPr/>
         </p:nvSpPr>
@@ -29395,7 +30023,7 @@
       </p:sp>
       <p:sp>
         <p:nvSpPr>
-          <p:cNvPr id="22" name="Text 20"/>
+          <p:cNvPr id="23" name="Text 21"/>
           <p:cNvSpPr/>
           <p:nvPr/>
         </p:nvSpPr>
@@ -29434,7 +30062,7 @@
       </p:sp>
       <p:sp>
         <p:nvSpPr>
-          <p:cNvPr id="23" name="Text 21"/>
+          <p:cNvPr id="24" name="Text 22"/>
           <p:cNvSpPr/>
           <p:nvPr/>
         </p:nvSpPr>
@@ -29473,7 +30101,7 @@
       </p:sp>
       <p:sp>
         <p:nvSpPr>
-          <p:cNvPr id="24" name="Shape 22"/>
+          <p:cNvPr id="25" name="Shape 23"/>
           <p:cNvSpPr/>
           <p:nvPr/>
         </p:nvSpPr>
@@ -29500,7 +30128,7 @@
       </p:sp>
       <p:sp>
         <p:nvSpPr>
-          <p:cNvPr id="25" name="Text 23"/>
+          <p:cNvPr id="26" name="Text 24"/>
           <p:cNvSpPr/>
           <p:nvPr/>
         </p:nvSpPr>
@@ -29539,7 +30167,7 @@
       </p:sp>
       <p:sp>
         <p:nvSpPr>
-          <p:cNvPr id="26" name="Text 24"/>
+          <p:cNvPr id="27" name="Text 25"/>
           <p:cNvSpPr/>
           <p:nvPr/>
         </p:nvSpPr>
@@ -29578,7 +30206,7 @@
       </p:sp>
       <p:sp>
         <p:nvSpPr>
-          <p:cNvPr id="27" name="Shape 25"/>
+          <p:cNvPr id="28" name="Shape 26"/>
           <p:cNvSpPr/>
           <p:nvPr/>
         </p:nvSpPr>
@@ -29605,7 +30233,7 @@
       </p:sp>
       <p:sp>
         <p:nvSpPr>
-          <p:cNvPr id="28" name="Text 26"/>
+          <p:cNvPr id="29" name="Text 27"/>
           <p:cNvSpPr/>
           <p:nvPr/>
         </p:nvSpPr>
@@ -29644,7 +30272,7 @@
       </p:sp>
       <p:sp>
         <p:nvSpPr>
-          <p:cNvPr id="29" name="Text 27"/>
+          <p:cNvPr id="30" name="Text 28"/>
           <p:cNvSpPr/>
           <p:nvPr/>
         </p:nvSpPr>
@@ -29683,7 +30311,7 @@
       </p:sp>
       <p:sp>
         <p:nvSpPr>
-          <p:cNvPr id="30" name="Shape 28"/>
+          <p:cNvPr id="31" name="Shape 29"/>
           <p:cNvSpPr/>
           <p:nvPr/>
         </p:nvSpPr>
@@ -29710,7 +30338,7 @@
       </p:sp>
       <p:sp>
         <p:nvSpPr>
-          <p:cNvPr id="31" name="Text 29"/>
+          <p:cNvPr id="32" name="Text 30"/>
           <p:cNvSpPr/>
           <p:nvPr/>
         </p:nvSpPr>
@@ -29878,12 +30506,12 @@
         </p:nvSpPr>
         <p:spPr>
           <a:xfrm>
-            <a:off x="10881360" y="256032"/>
-            <a:ext cx="1005840" cy="329184"/>
+            <a:off x="10625328" y="182880"/>
+            <a:ext cx="1234440" cy="310896"/>
           </a:xfrm>
           <a:prstGeom prst="rect">
             <a:avLst>
-              <a:gd name="adj" fmla="val 13889"/>
+              <a:gd name="adj" fmla="val 14706"/>
             </a:avLst>
           </a:prstGeom>
           <a:solidFill>
@@ -29907,7 +30535,7 @@
                 <a:ea typeface="Inter" pitchFamily="34" charset="-122"/>
                 <a:cs typeface="Inter" pitchFamily="34" charset="-120"/>
               </a:rPr>
-              <a:t>UC-05</a:t>
+              <a:t>ZTIC</a:t>
             </a:r>
             <a:endParaRPr lang="en-US" sz="1300" dirty="0"/>
           </a:p>
@@ -29916,6 +30544,45 @@
       <p:sp>
         <p:nvSpPr>
           <p:cNvPr id="6" name="Text 4"/>
+          <p:cNvSpPr/>
+          <p:nvPr/>
+        </p:nvSpPr>
+        <p:spPr>
+          <a:xfrm>
+            <a:off x="10168128" y="512064"/>
+            <a:ext cx="1691640" cy="201168"/>
+          </a:xfrm>
+          <a:prstGeom prst="rect">
+            <a:avLst/>
+          </a:prstGeom>
+          <a:noFill/>
+          <a:ln/>
+        </p:spPr>
+        <p:txBody>
+          <a:bodyPr wrap="square" rtlCol="0" anchor="ctr"/>
+          <a:lstStyle/>
+          <a:p>
+            <a:pPr algn="ctr" indent="0" marL="0">
+              <a:buNone/>
+            </a:pPr>
+            <a:r>
+              <a:rPr lang="en-US" sz="750" dirty="0">
+                <a:solidFill>
+                  <a:srgbClr val="94A3B8"/>
+                </a:solidFill>
+                <a:latin typeface="Inter" pitchFamily="34" charset="0"/>
+                <a:ea typeface="Inter" pitchFamily="34" charset="-122"/>
+                <a:cs typeface="Inter" pitchFamily="34" charset="-120"/>
+              </a:rPr>
+              <a:t>TCS Agentic AI · UC-05</a:t>
+            </a:r>
+            <a:endParaRPr lang="en-US" sz="750" dirty="0"/>
+          </a:p>
+        </p:txBody>
+      </p:sp>
+      <p:sp>
+        <p:nvSpPr>
+          <p:cNvPr id="7" name="Text 5"/>
           <p:cNvSpPr/>
           <p:nvPr/>
         </p:nvSpPr>
@@ -29954,7 +30621,7 @@
       </p:sp>
       <p:sp>
         <p:nvSpPr>
-          <p:cNvPr id="7" name="Shape 5"/>
+          <p:cNvPr id="8" name="Shape 6"/>
           <p:cNvSpPr/>
           <p:nvPr/>
         </p:nvSpPr>
@@ -29981,7 +30648,7 @@
       </p:sp>
       <p:sp>
         <p:nvSpPr>
-          <p:cNvPr id="8" name="Shape 6"/>
+          <p:cNvPr id="9" name="Shape 7"/>
           <p:cNvSpPr/>
           <p:nvPr/>
         </p:nvSpPr>
@@ -30001,7 +30668,7 @@
       </p:sp>
       <p:sp>
         <p:nvSpPr>
-          <p:cNvPr id="9" name="Text 7"/>
+          <p:cNvPr id="10" name="Text 8"/>
           <p:cNvSpPr/>
           <p:nvPr/>
         </p:nvSpPr>
@@ -30040,7 +30707,7 @@
       </p:sp>
       <p:sp>
         <p:nvSpPr>
-          <p:cNvPr id="10" name="Text 8"/>
+          <p:cNvPr id="11" name="Text 9"/>
           <p:cNvSpPr/>
           <p:nvPr/>
         </p:nvSpPr>
@@ -30079,7 +30746,7 @@
       </p:sp>
       <p:sp>
         <p:nvSpPr>
-          <p:cNvPr id="11" name="Text 9"/>
+          <p:cNvPr id="12" name="Text 10"/>
           <p:cNvSpPr/>
           <p:nvPr/>
         </p:nvSpPr>
@@ -30118,7 +30785,7 @@
       </p:sp>
       <p:sp>
         <p:nvSpPr>
-          <p:cNvPr id="12" name="Shape 10"/>
+          <p:cNvPr id="13" name="Shape 11"/>
           <p:cNvSpPr/>
           <p:nvPr/>
         </p:nvSpPr>
@@ -30145,7 +30812,7 @@
       </p:sp>
       <p:sp>
         <p:nvSpPr>
-          <p:cNvPr id="13" name="Shape 11"/>
+          <p:cNvPr id="14" name="Shape 12"/>
           <p:cNvSpPr/>
           <p:nvPr/>
         </p:nvSpPr>
@@ -30165,7 +30832,7 @@
       </p:sp>
       <p:sp>
         <p:nvSpPr>
-          <p:cNvPr id="14" name="Text 12"/>
+          <p:cNvPr id="15" name="Text 13"/>
           <p:cNvSpPr/>
           <p:nvPr/>
         </p:nvSpPr>
@@ -30204,7 +30871,7 @@
       </p:sp>
       <p:sp>
         <p:nvSpPr>
-          <p:cNvPr id="15" name="Text 13"/>
+          <p:cNvPr id="16" name="Text 14"/>
           <p:cNvSpPr/>
           <p:nvPr/>
         </p:nvSpPr>
@@ -30243,7 +30910,7 @@
       </p:sp>
       <p:sp>
         <p:nvSpPr>
-          <p:cNvPr id="16" name="Text 14"/>
+          <p:cNvPr id="17" name="Text 15"/>
           <p:cNvSpPr/>
           <p:nvPr/>
         </p:nvSpPr>
@@ -30282,7 +30949,7 @@
       </p:sp>
       <p:sp>
         <p:nvSpPr>
-          <p:cNvPr id="17" name="Shape 15"/>
+          <p:cNvPr id="18" name="Shape 16"/>
           <p:cNvSpPr/>
           <p:nvPr/>
         </p:nvSpPr>
@@ -30309,7 +30976,7 @@
       </p:sp>
       <p:sp>
         <p:nvSpPr>
-          <p:cNvPr id="18" name="Shape 16"/>
+          <p:cNvPr id="19" name="Shape 17"/>
           <p:cNvSpPr/>
           <p:nvPr/>
         </p:nvSpPr>
@@ -30329,7 +30996,7 @@
       </p:sp>
       <p:sp>
         <p:nvSpPr>
-          <p:cNvPr id="19" name="Text 17"/>
+          <p:cNvPr id="20" name="Text 18"/>
           <p:cNvSpPr/>
           <p:nvPr/>
         </p:nvSpPr>
@@ -30368,7 +31035,7 @@
       </p:sp>
       <p:sp>
         <p:nvSpPr>
-          <p:cNvPr id="20" name="Text 18"/>
+          <p:cNvPr id="21" name="Text 19"/>
           <p:cNvSpPr/>
           <p:nvPr/>
         </p:nvSpPr>
@@ -30407,7 +31074,7 @@
       </p:sp>
       <p:sp>
         <p:nvSpPr>
-          <p:cNvPr id="21" name="Text 19"/>
+          <p:cNvPr id="22" name="Text 20"/>
           <p:cNvSpPr/>
           <p:nvPr/>
         </p:nvSpPr>
@@ -30446,7 +31113,7 @@
       </p:sp>
       <p:sp>
         <p:nvSpPr>
-          <p:cNvPr id="22" name="Text 20"/>
+          <p:cNvPr id="23" name="Text 21"/>
           <p:cNvSpPr/>
           <p:nvPr/>
         </p:nvSpPr>
@@ -30485,7 +31152,7 @@
       </p:sp>
       <p:sp>
         <p:nvSpPr>
-          <p:cNvPr id="23" name="Shape 21"/>
+          <p:cNvPr id="24" name="Shape 22"/>
           <p:cNvSpPr/>
           <p:nvPr/>
         </p:nvSpPr>
@@ -30512,7 +31179,7 @@
       </p:sp>
       <p:sp>
         <p:nvSpPr>
-          <p:cNvPr id="24" name="Text 22"/>
+          <p:cNvPr id="25" name="Text 23"/>
           <p:cNvSpPr/>
           <p:nvPr/>
         </p:nvSpPr>
@@ -30551,7 +31218,7 @@
       </p:sp>
       <p:sp>
         <p:nvSpPr>
-          <p:cNvPr id="25" name="Text 23"/>
+          <p:cNvPr id="26" name="Text 24"/>
           <p:cNvSpPr/>
           <p:nvPr/>
         </p:nvSpPr>
@@ -30590,7 +31257,7 @@
       </p:sp>
       <p:sp>
         <p:nvSpPr>
-          <p:cNvPr id="26" name="Shape 24"/>
+          <p:cNvPr id="27" name="Shape 25"/>
           <p:cNvSpPr/>
           <p:nvPr/>
         </p:nvSpPr>
@@ -30617,7 +31284,7 @@
       </p:sp>
       <p:sp>
         <p:nvSpPr>
-          <p:cNvPr id="27" name="Text 25"/>
+          <p:cNvPr id="28" name="Text 26"/>
           <p:cNvSpPr/>
           <p:nvPr/>
         </p:nvSpPr>
@@ -30656,7 +31323,7 @@
       </p:sp>
       <p:sp>
         <p:nvSpPr>
-          <p:cNvPr id="28" name="Text 26"/>
+          <p:cNvPr id="29" name="Text 27"/>
           <p:cNvSpPr/>
           <p:nvPr/>
         </p:nvSpPr>
@@ -30824,12 +31491,12 @@
         </p:nvSpPr>
         <p:spPr>
           <a:xfrm>
-            <a:off x="10881360" y="256032"/>
-            <a:ext cx="1005840" cy="329184"/>
+            <a:off x="10625328" y="182880"/>
+            <a:ext cx="1234440" cy="310896"/>
           </a:xfrm>
           <a:prstGeom prst="rect">
             <a:avLst>
-              <a:gd name="adj" fmla="val 13889"/>
+              <a:gd name="adj" fmla="val 14706"/>
             </a:avLst>
           </a:prstGeom>
           <a:solidFill>
@@ -30853,7 +31520,7 @@
                 <a:ea typeface="Inter" pitchFamily="34" charset="-122"/>
                 <a:cs typeface="Inter" pitchFamily="34" charset="-120"/>
               </a:rPr>
-              <a:t>UC-05</a:t>
+              <a:t>ZTIC</a:t>
             </a:r>
             <a:endParaRPr lang="en-US" sz="1300" dirty="0"/>
           </a:p>
@@ -30862,6 +31529,45 @@
       <p:sp>
         <p:nvSpPr>
           <p:cNvPr id="6" name="Text 4"/>
+          <p:cNvSpPr/>
+          <p:nvPr/>
+        </p:nvSpPr>
+        <p:spPr>
+          <a:xfrm>
+            <a:off x="10168128" y="512064"/>
+            <a:ext cx="1691640" cy="201168"/>
+          </a:xfrm>
+          <a:prstGeom prst="rect">
+            <a:avLst/>
+          </a:prstGeom>
+          <a:noFill/>
+          <a:ln/>
+        </p:spPr>
+        <p:txBody>
+          <a:bodyPr wrap="square" rtlCol="0" anchor="ctr"/>
+          <a:lstStyle/>
+          <a:p>
+            <a:pPr algn="ctr" indent="0" marL="0">
+              <a:buNone/>
+            </a:pPr>
+            <a:r>
+              <a:rPr lang="en-US" sz="750" dirty="0">
+                <a:solidFill>
+                  <a:srgbClr val="94A3B8"/>
+                </a:solidFill>
+                <a:latin typeface="Inter" pitchFamily="34" charset="0"/>
+                <a:ea typeface="Inter" pitchFamily="34" charset="-122"/>
+                <a:cs typeface="Inter" pitchFamily="34" charset="-120"/>
+              </a:rPr>
+              <a:t>TCS Agentic AI · UC-05</a:t>
+            </a:r>
+            <a:endParaRPr lang="en-US" sz="750" dirty="0"/>
+          </a:p>
+        </p:txBody>
+      </p:sp>
+      <p:sp>
+        <p:nvSpPr>
+          <p:cNvPr id="7" name="Text 5"/>
           <p:cNvSpPr/>
           <p:nvPr/>
         </p:nvSpPr>
@@ -30900,7 +31606,7 @@
       </p:sp>
       <p:sp>
         <p:nvSpPr>
-          <p:cNvPr id="7" name="Shape 5"/>
+          <p:cNvPr id="8" name="Shape 6"/>
           <p:cNvSpPr/>
           <p:nvPr/>
         </p:nvSpPr>
@@ -30927,7 +31633,7 @@
       </p:sp>
       <p:sp>
         <p:nvSpPr>
-          <p:cNvPr id="8" name="Text 6"/>
+          <p:cNvPr id="9" name="Text 7"/>
           <p:cNvSpPr/>
           <p:nvPr/>
         </p:nvSpPr>
@@ -31000,7 +31706,7 @@
       </p:sp>
       <p:sp>
         <p:nvSpPr>
-          <p:cNvPr id="9" name="Shape 7"/>
+          <p:cNvPr id="10" name="Shape 8"/>
           <p:cNvSpPr/>
           <p:nvPr/>
         </p:nvSpPr>
@@ -31027,7 +31733,7 @@
       </p:sp>
       <p:sp>
         <p:nvSpPr>
-          <p:cNvPr id="10" name="Text 8"/>
+          <p:cNvPr id="11" name="Text 9"/>
           <p:cNvSpPr/>
           <p:nvPr/>
         </p:nvSpPr>
@@ -31083,7 +31789,7 @@
       </p:sp>
       <p:sp>
         <p:nvSpPr>
-          <p:cNvPr id="11" name="Shape 9"/>
+          <p:cNvPr id="12" name="Shape 10"/>
           <p:cNvSpPr/>
           <p:nvPr/>
         </p:nvSpPr>
@@ -31110,7 +31816,7 @@
       </p:sp>
       <p:sp>
         <p:nvSpPr>
-          <p:cNvPr id="12" name="Text 10"/>
+          <p:cNvPr id="13" name="Text 11"/>
           <p:cNvSpPr/>
           <p:nvPr/>
         </p:nvSpPr>
@@ -31166,7 +31872,7 @@
       </p:sp>
       <p:sp>
         <p:nvSpPr>
-          <p:cNvPr id="13" name="Shape 11"/>
+          <p:cNvPr id="14" name="Shape 12"/>
           <p:cNvSpPr/>
           <p:nvPr/>
         </p:nvSpPr>
@@ -31193,7 +31899,7 @@
       </p:sp>
       <p:sp>
         <p:nvSpPr>
-          <p:cNvPr id="14" name="Text 12"/>
+          <p:cNvPr id="15" name="Text 13"/>
           <p:cNvSpPr/>
           <p:nvPr/>
         </p:nvSpPr>
@@ -31249,7 +31955,7 @@
       </p:sp>
       <p:sp>
         <p:nvSpPr>
-          <p:cNvPr id="15" name="Shape 13"/>
+          <p:cNvPr id="16" name="Shape 14"/>
           <p:cNvSpPr/>
           <p:nvPr/>
         </p:nvSpPr>
@@ -31276,7 +31982,7 @@
       </p:sp>
       <p:sp>
         <p:nvSpPr>
-          <p:cNvPr id="16" name="Text 14"/>
+          <p:cNvPr id="17" name="Text 15"/>
           <p:cNvSpPr/>
           <p:nvPr/>
         </p:nvSpPr>
@@ -31332,7 +32038,7 @@
       </p:sp>
       <p:sp>
         <p:nvSpPr>
-          <p:cNvPr id="17" name="Text 15"/>
+          <p:cNvPr id="18" name="Text 16"/>
           <p:cNvSpPr/>
           <p:nvPr/>
         </p:nvSpPr>
@@ -31371,7 +32077,7 @@
       </p:sp>
       <p:sp>
         <p:nvSpPr>
-          <p:cNvPr id="18" name="Shape 16"/>
+          <p:cNvPr id="19" name="Shape 17"/>
           <p:cNvSpPr/>
           <p:nvPr/>
         </p:nvSpPr>
@@ -31398,7 +32104,7 @@
       </p:sp>
       <p:sp>
         <p:nvSpPr>
-          <p:cNvPr id="19" name="Text 17"/>
+          <p:cNvPr id="20" name="Text 18"/>
           <p:cNvSpPr/>
           <p:nvPr/>
         </p:nvSpPr>
@@ -31437,7 +32143,7 @@
       </p:sp>
       <p:sp>
         <p:nvSpPr>
-          <p:cNvPr id="20" name="Text 18"/>
+          <p:cNvPr id="21" name="Text 19"/>
           <p:cNvSpPr/>
           <p:nvPr/>
         </p:nvSpPr>
@@ -31476,7 +32182,7 @@
       </p:sp>
       <p:sp>
         <p:nvSpPr>
-          <p:cNvPr id="21" name="Shape 19"/>
+          <p:cNvPr id="22" name="Shape 20"/>
           <p:cNvSpPr/>
           <p:nvPr/>
         </p:nvSpPr>
@@ -31503,7 +32209,7 @@
       </p:sp>
       <p:sp>
         <p:nvSpPr>
-          <p:cNvPr id="22" name="Text 20"/>
+          <p:cNvPr id="23" name="Text 21"/>
           <p:cNvSpPr/>
           <p:nvPr/>
         </p:nvSpPr>
@@ -31542,7 +32248,7 @@
       </p:sp>
       <p:sp>
         <p:nvSpPr>
-          <p:cNvPr id="23" name="Text 21"/>
+          <p:cNvPr id="24" name="Text 22"/>
           <p:cNvSpPr/>
           <p:nvPr/>
         </p:nvSpPr>
@@ -31581,7 +32287,7 @@
       </p:sp>
       <p:sp>
         <p:nvSpPr>
-          <p:cNvPr id="24" name="Shape 22"/>
+          <p:cNvPr id="25" name="Shape 23"/>
           <p:cNvSpPr/>
           <p:nvPr/>
         </p:nvSpPr>
@@ -31608,7 +32314,7 @@
       </p:sp>
       <p:sp>
         <p:nvSpPr>
-          <p:cNvPr id="25" name="Text 23"/>
+          <p:cNvPr id="26" name="Text 24"/>
           <p:cNvSpPr/>
           <p:nvPr/>
         </p:nvSpPr>
@@ -31647,7 +32353,7 @@
       </p:sp>
       <p:sp>
         <p:nvSpPr>
-          <p:cNvPr id="26" name="Text 24"/>
+          <p:cNvPr id="27" name="Text 25"/>
           <p:cNvSpPr/>
           <p:nvPr/>
         </p:nvSpPr>
@@ -31686,7 +32392,7 @@
       </p:sp>
       <p:sp>
         <p:nvSpPr>
-          <p:cNvPr id="27" name="Shape 25"/>
+          <p:cNvPr id="28" name="Shape 26"/>
           <p:cNvSpPr/>
           <p:nvPr/>
         </p:nvSpPr>
@@ -31713,7 +32419,7 @@
       </p:sp>
       <p:sp>
         <p:nvSpPr>
-          <p:cNvPr id="28" name="Text 26"/>
+          <p:cNvPr id="29" name="Text 27"/>
           <p:cNvSpPr/>
           <p:nvPr/>
         </p:nvSpPr>
@@ -31752,7 +32458,7 @@
       </p:sp>
       <p:sp>
         <p:nvSpPr>
-          <p:cNvPr id="29" name="Text 27"/>
+          <p:cNvPr id="30" name="Text 28"/>
           <p:cNvSpPr/>
           <p:nvPr/>
         </p:nvSpPr>
@@ -31791,7 +32497,7 @@
       </p:sp>
       <p:sp>
         <p:nvSpPr>
-          <p:cNvPr id="30" name="Shape 28"/>
+          <p:cNvPr id="31" name="Shape 29"/>
           <p:cNvSpPr/>
           <p:nvPr/>
         </p:nvSpPr>
@@ -31818,7 +32524,7 @@
       </p:sp>
       <p:sp>
         <p:nvSpPr>
-          <p:cNvPr id="31" name="Text 29"/>
+          <p:cNvPr id="32" name="Text 30"/>
           <p:cNvSpPr/>
           <p:nvPr/>
         </p:nvSpPr>
@@ -31857,7 +32563,7 @@
       </p:sp>
       <p:sp>
         <p:nvSpPr>
-          <p:cNvPr id="32" name="Text 30"/>
+          <p:cNvPr id="33" name="Text 31"/>
           <p:cNvSpPr/>
           <p:nvPr/>
         </p:nvSpPr>
@@ -31896,7 +32602,7 @@
       </p:sp>
       <p:sp>
         <p:nvSpPr>
-          <p:cNvPr id="33" name="Shape 31"/>
+          <p:cNvPr id="34" name="Shape 32"/>
           <p:cNvSpPr/>
           <p:nvPr/>
         </p:nvSpPr>
@@ -31923,7 +32629,7 @@
       </p:sp>
       <p:sp>
         <p:nvSpPr>
-          <p:cNvPr id="34" name="Text 32"/>
+          <p:cNvPr id="35" name="Text 33"/>
           <p:cNvSpPr/>
           <p:nvPr/>
         </p:nvSpPr>
@@ -31962,7 +32668,7 @@
       </p:sp>
       <p:sp>
         <p:nvSpPr>
-          <p:cNvPr id="35" name="Text 33"/>
+          <p:cNvPr id="36" name="Text 34"/>
           <p:cNvSpPr/>
           <p:nvPr/>
         </p:nvSpPr>
@@ -32001,7 +32707,7 @@
       </p:sp>
       <p:sp>
         <p:nvSpPr>
-          <p:cNvPr id="36" name="Shape 34"/>
+          <p:cNvPr id="37" name="Shape 35"/>
           <p:cNvSpPr/>
           <p:nvPr/>
         </p:nvSpPr>
@@ -32028,7 +32734,7 @@
       </p:sp>
       <p:sp>
         <p:nvSpPr>
-          <p:cNvPr id="37" name="Text 35"/>
+          <p:cNvPr id="38" name="Text 36"/>
           <p:cNvSpPr/>
           <p:nvPr/>
         </p:nvSpPr>
@@ -32067,7 +32773,7 @@
       </p:sp>
       <p:sp>
         <p:nvSpPr>
-          <p:cNvPr id="38" name="Text 36"/>
+          <p:cNvPr id="39" name="Text 37"/>
           <p:cNvSpPr/>
           <p:nvPr/>
         </p:nvSpPr>
@@ -32106,7 +32812,7 @@
       </p:sp>
       <p:sp>
         <p:nvSpPr>
-          <p:cNvPr id="39" name="Shape 37"/>
+          <p:cNvPr id="40" name="Shape 38"/>
           <p:cNvSpPr/>
           <p:nvPr/>
         </p:nvSpPr>
@@ -32133,7 +32839,7 @@
       </p:sp>
       <p:sp>
         <p:nvSpPr>
-          <p:cNvPr id="40" name="Text 38"/>
+          <p:cNvPr id="41" name="Text 39"/>
           <p:cNvSpPr/>
           <p:nvPr/>
         </p:nvSpPr>
@@ -32172,7 +32878,7 @@
       </p:sp>
       <p:sp>
         <p:nvSpPr>
-          <p:cNvPr id="41" name="Text 39"/>
+          <p:cNvPr id="42" name="Text 40"/>
           <p:cNvSpPr/>
           <p:nvPr/>
         </p:nvSpPr>
@@ -32211,7 +32917,7 @@
       </p:sp>
       <p:sp>
         <p:nvSpPr>
-          <p:cNvPr id="42" name="Shape 40"/>
+          <p:cNvPr id="43" name="Shape 41"/>
           <p:cNvSpPr/>
           <p:nvPr/>
         </p:nvSpPr>
@@ -32238,7 +32944,7 @@
       </p:sp>
       <p:sp>
         <p:nvSpPr>
-          <p:cNvPr id="43" name="Text 41"/>
+          <p:cNvPr id="44" name="Text 42"/>
           <p:cNvSpPr/>
           <p:nvPr/>
         </p:nvSpPr>
